--- a/demos/EdgeComputing.pptx
+++ b/demos/EdgeComputing.pptx
@@ -4,6 +4,9 @@
   <p:sldMasterIdLst>
     <p:sldMasterId id="2147483648" r:id="rId1"/>
   </p:sldMasterIdLst>
+  <p:notesMasterIdLst>
+    <p:notesMasterId r:id="rId14"/>
+  </p:notesMasterIdLst>
   <p:sldIdLst>
     <p:sldId id="256" r:id="rId2"/>
     <p:sldId id="257" r:id="rId3"/>
@@ -18,10 +21,7 @@
     <p:sldId id="266" r:id="rId12"/>
     <p:sldId id="267" r:id="rId13"/>
   </p:sldIdLst>
-  <p:notesMasterIdLst>
-    <p:notesMasterId r:id="rId14"/>
-  </p:notesMasterIdLst>
-  <p:sldSz cx="9144000" cy="5143500"/>
+  <p:sldSz cx="9144000" cy="5143500" type="screen16x9"/>
   <p:notesSz cx="5143500" cy="9144000"/>
   <p:defaultTextStyle>
     <a:lvl1pPr marL="0" algn="l" defTabSz="914400" rtl="0" eaLnBrk="1" latinLnBrk="0" hangingPunct="1">
@@ -115,13 +115,20 @@
       </a:defRPr>
     </a:lvl9pPr>
   </p:defaultTextStyle>
+  <p:extLst>
+    <p:ext uri="{EFAFB233-063F-42B5-8137-9DF3F51BA10A}">
+      <p15:sldGuideLst xmlns:p15="http://schemas.microsoft.com/office/powerpoint/2012/main"/>
+    </p:ext>
+  </p:extLst>
 </p:presentation>
 </file>
 
 <file path=ppt/charts/chart1.xml><?xml version="1.0" encoding="utf-8"?>
-<c:chartSpace xmlns:c="http://schemas.openxmlformats.org/drawingml/2006/chart" xmlns:a="http://schemas.openxmlformats.org/drawingml/2006/main" xmlns:r="http://schemas.openxmlformats.org/officeDocument/2006/relationships">
+<c:chartSpace xmlns:c="http://schemas.openxmlformats.org/drawingml/2006/chart" xmlns:a="http://schemas.openxmlformats.org/drawingml/2006/main" xmlns:r="http://schemas.openxmlformats.org/officeDocument/2006/relationships" xmlns:c16r2="http://schemas.microsoft.com/office/drawing/2015/06/chart">
   <c:date1904 val="0"/>
+  <c:lang val="en-US"/>
   <c:roundedCorners val="1"/>
+  <c:style val="2"/>
   <c:chart>
     <c:autoTitleDeleted val="1"/>
     <c:plotArea>
@@ -153,18 +160,26 @@
           <c:invertIfNegative val="0"/>
           <c:dLbls>
             <c:numFmt formatCode="#,##0" sourceLinked="0"/>
+            <c:spPr>
+              <a:noFill/>
+              <a:ln>
+                <a:noFill/>
+              </a:ln>
+              <a:effectLst/>
+            </c:spPr>
             <c:txPr>
               <a:bodyPr/>
               <a:lstStyle/>
               <a:p>
                 <a:pPr>
-                  <a:defRPr b="0" i="0" strike="noStrike" sz="900" u="none">
+                  <a:defRPr sz="900" b="0" i="0" u="none" strike="noStrike">
                     <a:solidFill>
                       <a:srgbClr val="1E293B"/>
                     </a:solidFill>
                     <a:latin typeface="Arial"/>
                   </a:defRPr>
                 </a:pPr>
+                <a:endParaRPr lang="en-DE"/>
               </a:p>
             </c:txPr>
             <c:showLegendKey val="0"/>
@@ -174,24 +189,27 @@
             <c:showPercent val="0"/>
             <c:showBubbleSize val="0"/>
             <c:showLeaderLines val="0"/>
+            <c:extLst>
+              <c:ext xmlns:c15="http://schemas.microsoft.com/office/drawing/2012/chart" uri="{CE6537A1-D6FC-4f65-9D91-7224C49458BB}">
+                <c15:showLeaderLines val="0"/>
+              </c:ext>
+            </c:extLst>
           </c:dLbls>
           <c:cat>
-            <c:multiLvlStrRef>
+            <c:strRef>
               <c:f>Sheet1!$A$2:$A$3</c:f>
-              <c:multiLvlStrCache>
+              <c:strCache>
                 <c:ptCount val="2"/>
-                <c:lvl>
-                  <c:pt idx="0">
-                    <c:v>Paderborn
+                <c:pt idx="0">
+                  <c:v>Paderborn
 Home Wi-Fi</c:v>
-                  </c:pt>
-                  <c:pt idx="1">
-                    <c:v>HSHL Central
+                </c:pt>
+                <c:pt idx="1">
+                  <c:v>HSHL Central
 Wi-Fi</c:v>
-                  </c:pt>
-                </c:lvl>
-              </c:multiLvlStrCache>
-            </c:multiLvlStrRef>
+                </c:pt>
+              </c:strCache>
+            </c:strRef>
           </c:cat>
           <c:val>
             <c:numRef>
@@ -208,6 +226,11 @@
               </c:numCache>
             </c:numRef>
           </c:val>
+          <c:extLst>
+            <c:ext xmlns:c16="http://schemas.microsoft.com/office/drawing/2014/chart" uri="{C3380CC4-5D6E-409C-BE32-E72D297353CC}">
+              <c16:uniqueId val="{00000000-F609-499B-863F-AA0D68086B4F}"/>
+            </c:ext>
+          </c:extLst>
         </c:ser>
         <c:ser>
           <c:idx val="1"/>
@@ -232,18 +255,26 @@
           <c:invertIfNegative val="0"/>
           <c:dLbls>
             <c:numFmt formatCode="#,##0" sourceLinked="0"/>
+            <c:spPr>
+              <a:noFill/>
+              <a:ln>
+                <a:noFill/>
+              </a:ln>
+              <a:effectLst/>
+            </c:spPr>
             <c:txPr>
               <a:bodyPr/>
               <a:lstStyle/>
               <a:p>
                 <a:pPr>
-                  <a:defRPr b="0" i="0" strike="noStrike" sz="900" u="none">
+                  <a:defRPr sz="900" b="0" i="0" u="none" strike="noStrike">
                     <a:solidFill>
                       <a:srgbClr val="1E293B"/>
                     </a:solidFill>
                     <a:latin typeface="Arial"/>
                   </a:defRPr>
                 </a:pPr>
+                <a:endParaRPr lang="en-DE"/>
               </a:p>
             </c:txPr>
             <c:showLegendKey val="0"/>
@@ -253,24 +284,27 @@
             <c:showPercent val="0"/>
             <c:showBubbleSize val="0"/>
             <c:showLeaderLines val="0"/>
+            <c:extLst>
+              <c:ext xmlns:c15="http://schemas.microsoft.com/office/drawing/2012/chart" uri="{CE6537A1-D6FC-4f65-9D91-7224C49458BB}">
+                <c15:showLeaderLines val="0"/>
+              </c:ext>
+            </c:extLst>
           </c:dLbls>
           <c:cat>
-            <c:multiLvlStrRef>
+            <c:strRef>
               <c:f>Sheet1!$A$2:$A$3</c:f>
-              <c:multiLvlStrCache>
+              <c:strCache>
                 <c:ptCount val="2"/>
-                <c:lvl>
-                  <c:pt idx="0">
-                    <c:v>Paderborn
+                <c:pt idx="0">
+                  <c:v>Paderborn
 Home Wi-Fi</c:v>
-                  </c:pt>
-                  <c:pt idx="1">
-                    <c:v>HSHL Central
+                </c:pt>
+                <c:pt idx="1">
+                  <c:v>HSHL Central
 Wi-Fi</c:v>
-                  </c:pt>
-                </c:lvl>
-              </c:multiLvlStrCache>
-            </c:multiLvlStrRef>
+                </c:pt>
+              </c:strCache>
+            </c:strRef>
           </c:cat>
           <c:val>
             <c:numRef>
@@ -287,36 +321,23 @@
               </c:numCache>
             </c:numRef>
           </c:val>
+          <c:extLst>
+            <c:ext xmlns:c16="http://schemas.microsoft.com/office/drawing/2014/chart" uri="{C3380CC4-5D6E-409C-BE32-E72D297353CC}">
+              <c16:uniqueId val="{00000001-F609-499B-863F-AA0D68086B4F}"/>
+            </c:ext>
+          </c:extLst>
         </c:ser>
         <c:dLbls>
-          <c:numFmt formatCode="#,##0" sourceLinked="0"/>
-          <c:txPr>
-            <a:bodyPr/>
-            <a:lstStyle/>
-            <a:p>
-              <a:pPr>
-                <a:defRPr b="0" i="0" strike="noStrike" sz="900" u="none">
-                  <a:solidFill>
-                    <a:srgbClr val="1E293B"/>
-                  </a:solidFill>
-                  <a:latin typeface="Arial"/>
-                </a:defRPr>
-              </a:pPr>
-            </a:p>
-          </c:txPr>
           <c:showLegendKey val="0"/>
           <c:showVal val="1"/>
           <c:showCatName val="0"/>
           <c:showSerName val="0"/>
           <c:showPercent val="0"/>
           <c:showBubbleSize val="0"/>
-          <c:showLeaderLines val="0"/>
         </c:dLbls>
         <c:gapWidth val="150"/>
-        <c:overlap val="0"/>
         <c:axId val="2094734554"/>
         <c:axId val="2094734552"/>
-        <c:axId val="2094734556"/>
       </c:barChart>
       <c:catAx>
         <c:axId val="2094734554"/>
@@ -357,6 +378,7 @@
         <c:crosses val="autoZero"/>
         <c:auto val="1"/>
         <c:lblAlgn val="ctr"/>
+        <c:lblOffset val="100"/>
         <c:noMultiLvlLbl val="1"/>
       </c:catAx>
       <c:valAx>
@@ -392,7 +414,7 @@
                   </a:defRPr>
                 </a:pPr>
                 <a:r>
-                  <a:rPr sz="1000" b="0" i="0" u="none" strike="noStrike">
+                  <a:rPr lang="de-DE" sz="1000" b="0" i="0" u="none" strike="noStrike">
                     <a:solidFill>
                       <a:srgbClr val="5E8FAA"/>
                     </a:solidFill>
@@ -403,7 +425,6 @@
               </a:p>
             </c:rich>
           </c:tx>
-          <c:layout/>
           <c:overlay val="0"/>
         </c:title>
         <c:numFmt formatCode="General" sourceLinked="0"/>
@@ -454,7 +475,7 @@
         <a:lstStyle/>
         <a:p>
           <a:pPr>
-            <a:defRPr sz="1100">      </a:defRPr>
+            <a:defRPr sz="1100"/>
           </a:pPr>
           <a:endParaRPr lang="en-US"/>
         </a:p>
@@ -462,6 +483,7 @@
     </c:legend>
     <c:plotVisOnly val="1"/>
     <c:dispBlanksAs val="span"/>
+    <c:showDLblsOverMax val="1"/>
   </c:chart>
   <c:spPr>
     <a:solidFill>
@@ -500,234 +522,10 @@
           <a:chExt cx="0" cy="0"/>
         </a:xfrm>
       </p:grpSpPr>
-      <p:sp>
-        <p:nvSpPr>
-          <p:cNvPr id="2" name="Header Placeholder 1"/>
-          <p:cNvSpPr>
-            <a:spLocks noGrp="1"/>
-          </p:cNvSpPr>
-          <p:nvPr>
-            <p:ph type="hdr" sz="quarter"/>
-          </p:nvPr>
-        </p:nvSpPr>
-        <p:spPr>
-          <a:xfrm>
-            <a:off x="0" y="0"/>
-            <a:ext cx="2971800" cy="458788"/>
-          </a:xfrm>
-          <a:prstGeom prst="rect">
-            <a:avLst/>
-          </a:prstGeom>
-        </p:spPr>
-        <p:txBody>
-          <a:bodyPr vert="horz" lIns="91440" tIns="45720" rIns="91440" bIns="45720" rtlCol="0"/>
-          <a:lstStyle>
-            <a:lvl1pPr algn="l">
-              <a:defRPr sz="1200"/>
-            </a:lvl1pPr>
-          </a:lstStyle>
-          <a:p>
-            <a:endParaRPr lang="en-US"/>
-          </a:p>
-        </p:txBody>
-      </p:sp>
-      <p:sp>
-        <p:nvSpPr>
-          <p:cNvPr id="3" name="Date Placeholder 2"/>
-          <p:cNvSpPr>
-            <a:spLocks noGrp="1"/>
-          </p:cNvSpPr>
-          <p:nvPr>
-            <p:ph type="dt" idx="1"/>
-          </p:nvPr>
-        </p:nvSpPr>
-        <p:spPr>
-          <a:xfrm>
-            <a:off x="3884613" y="0"/>
-            <a:ext cx="2971800" cy="458788"/>
-          </a:xfrm>
-          <a:prstGeom prst="rect">
-            <a:avLst/>
-          </a:prstGeom>
-        </p:spPr>
-        <p:txBody>
-          <a:bodyPr vert="horz" lIns="91440" tIns="45720" rIns="91440" bIns="45720" rtlCol="0"/>
-          <a:lstStyle>
-            <a:lvl1pPr algn="r">
-              <a:defRPr sz="1200"/>
-            </a:lvl1pPr>
-          </a:lstStyle>
-          <a:p>
-            <a:fld id="{5282F153-3F37-0F45-9E97-73ACFA13230C}" type="datetimeFigureOut">
-              <a:rPr lang="en-US"/>
-              <a:t>7/23/19</a:t>
-            </a:fld>
-            <a:endParaRPr lang="en-US"/>
-          </a:p>
-        </p:txBody>
-      </p:sp>
-      <p:sp>
-        <p:nvSpPr>
-          <p:cNvPr id="4" name="Slide Image Placeholder 3"/>
-          <p:cNvSpPr>
-            <a:spLocks noGrp="1" noRot="1" noChangeAspect="1"/>
-          </p:cNvSpPr>
-          <p:nvPr>
-            <p:ph type="sldImg" idx="2"/>
-          </p:nvPr>
-        </p:nvSpPr>
-        <p:spPr>
-          <a:xfrm>
-            <a:off x="685800" y="1143000"/>
-            <a:ext cx="5486400" cy="3086100"/>
-          </a:xfrm>
-          <a:prstGeom prst="rect">
-            <a:avLst/>
-          </a:prstGeom>
-          <a:noFill/>
-          <a:ln w="12700">
-            <a:solidFill>
-              <a:prstClr val="black"/>
-            </a:solidFill>
-          </a:ln>
-        </p:spPr>
-        <p:txBody>
-          <a:bodyPr vert="horz" lIns="91440" tIns="45720" rIns="91440" bIns="45720" rtlCol="0" anchor="ctr"/>
-          <a:lstStyle/>
-          <a:p>
-            <a:endParaRPr lang="en-US"/>
-          </a:p>
-        </p:txBody>
-      </p:sp>
-      <p:sp>
-        <p:nvSpPr>
-          <p:cNvPr id="5" name="Notes Placeholder 4"/>
-          <p:cNvSpPr>
-            <a:spLocks noGrp="1"/>
-          </p:cNvSpPr>
-          <p:nvPr>
-            <p:ph type="body" sz="quarter" idx="3"/>
-          </p:nvPr>
-        </p:nvSpPr>
-        <p:spPr>
-          <a:xfrm>
-            <a:off x="685800" y="4400550"/>
-            <a:ext cx="5486400" cy="3600450"/>
-          </a:xfrm>
-          <a:prstGeom prst="rect">
-            <a:avLst/>
-          </a:prstGeom>
-        </p:spPr>
-        <p:txBody>
-          <a:bodyPr vert="horz" lIns="91440" tIns="45720" rIns="91440" bIns="45720" rtlCol="0"/>
-          <a:lstStyle/>
-          <a:p>
-            <a:pPr lvl="0"/>
-            <a:r>
-              <a:rPr lang="en-US"/>
-              <a:t>Click to edit Master text styles</a:t>
-            </a:r>
-          </a:p>
-          <a:p>
-            <a:pPr lvl="1"/>
-            <a:r>
-              <a:rPr lang="en-US"/>
-              <a:t>Second level</a:t>
-            </a:r>
-          </a:p>
-          <a:p>
-            <a:pPr lvl="2"/>
-            <a:r>
-              <a:rPr lang="en-US"/>
-              <a:t>Third level</a:t>
-            </a:r>
-          </a:p>
-          <a:p>
-            <a:pPr lvl="3"/>
-            <a:r>
-              <a:rPr lang="en-US"/>
-              <a:t>Fourth level</a:t>
-            </a:r>
-          </a:p>
-          <a:p>
-            <a:pPr lvl="4"/>
-            <a:r>
-              <a:rPr lang="en-US"/>
-              <a:t>Fifth level</a:t>
-            </a:r>
-          </a:p>
-        </p:txBody>
-      </p:sp>
-      <p:sp>
-        <p:nvSpPr>
-          <p:cNvPr id="6" name="Footer Placeholder 5"/>
-          <p:cNvSpPr>
-            <a:spLocks noGrp="1"/>
-          </p:cNvSpPr>
-          <p:nvPr>
-            <p:ph type="ftr" sz="quarter" idx="4"/>
-          </p:nvPr>
-        </p:nvSpPr>
-        <p:spPr>
-          <a:xfrm>
-            <a:off x="0" y="8685213"/>
-            <a:ext cx="2971800" cy="458787"/>
-          </a:xfrm>
-          <a:prstGeom prst="rect">
-            <a:avLst/>
-          </a:prstGeom>
-        </p:spPr>
-        <p:txBody>
-          <a:bodyPr vert="horz" lIns="91440" tIns="45720" rIns="91440" bIns="45720" rtlCol="0" anchor="b"/>
-          <a:lstStyle>
-            <a:lvl1pPr algn="l">
-              <a:defRPr sz="1200"/>
-            </a:lvl1pPr>
-          </a:lstStyle>
-          <a:p>
-            <a:endParaRPr lang="en-US"/>
-          </a:p>
-        </p:txBody>
-      </p:sp>
-      <p:sp>
-        <p:nvSpPr>
-          <p:cNvPr id="7" name="Slide Number Placeholder 6"/>
-          <p:cNvSpPr>
-            <a:spLocks noGrp="1"/>
-          </p:cNvSpPr>
-          <p:nvPr>
-            <p:ph type="sldNum" sz="quarter" idx="5"/>
-          </p:nvPr>
-        </p:nvSpPr>
-        <p:spPr>
-          <a:xfrm>
-            <a:off x="3884613" y="8685213"/>
-            <a:ext cx="2971800" cy="458787"/>
-          </a:xfrm>
-          <a:prstGeom prst="rect">
-            <a:avLst/>
-          </a:prstGeom>
-        </p:spPr>
-        <p:txBody>
-          <a:bodyPr vert="horz" lIns="91440" tIns="45720" rIns="91440" bIns="45720" rtlCol="0" anchor="b"/>
-          <a:lstStyle>
-            <a:lvl1pPr algn="r">
-              <a:defRPr sz="1200"/>
-            </a:lvl1pPr>
-          </a:lstStyle>
-          <a:p>
-            <a:fld id="{CE5E9CC1-C706-0F49-92D6-E571CC5EEA8F}" type="slidenum">
-              <a:rPr lang="en-US"/>
-              <a:t>‹#›</a:t>
-            </a:fld>
-            <a:endParaRPr lang="en-US"/>
-          </a:p>
-        </p:txBody>
-      </p:sp>
     </p:spTree>
     <p:extLst>
       <p:ext uri="{BB962C8B-B14F-4D97-AF65-F5344CB8AC3E}">
-        <p14:creationId xmlns:p14="http://schemas.microsoft.com/office/powerpoint/2010/main" val="1024086991"/>
+        <p14:creationId xmlns:p14="http://schemas.microsoft.com/office/powerpoint/2010/main" val="784382831"/>
       </p:ext>
     </p:extLst>
   </p:cSld>
@@ -875,7 +673,6 @@
               <a:rPr lang="en-US" dirty="0"/>
               <a:t>Title slide — introduce the paper and the team.</a:t>
             </a:r>
-            <a:endParaRPr lang="en-US" dirty="0"/>
           </a:p>
         </p:txBody>
       </p:sp>
@@ -963,7 +760,6 @@
               <a:rPr lang="en-US" dirty="0"/>
               <a:t>Cloud-only processing cannot handle any of these scenarios — latency is simply too high for real-time safety decisions.</a:t>
             </a:r>
-            <a:endParaRPr lang="en-US" dirty="0"/>
           </a:p>
         </p:txBody>
       </p:sp>
@@ -1051,7 +847,6 @@
               <a:rPr lang="en-US" dirty="0"/>
               <a:t>These challenges are real but solvable — dedicated private networks, hardware security modules, and centralised device management platforms address most of them.</a:t>
             </a:r>
-            <a:endParaRPr lang="en-US" dirty="0"/>
           </a:p>
         </p:txBody>
       </p:sp>
@@ -1139,7 +934,6 @@
               <a:rPr lang="en-US" dirty="0"/>
               <a:t>Wrap up: edge + cloud is complementary. Key stat: 5.1–5.4× speed advantage confirmed in real measurements.</a:t>
             </a:r>
-            <a:endParaRPr lang="en-US" dirty="0"/>
           </a:p>
         </p:txBody>
       </p:sp>
@@ -1227,7 +1021,6 @@
               <a:rPr lang="en-US" dirty="0"/>
               <a:t>Walk through the six sections of the presentation.</a:t>
             </a:r>
-            <a:endParaRPr lang="en-US" dirty="0"/>
           </a:p>
         </p:txBody>
       </p:sp>
@@ -1315,7 +1108,6 @@
               <a:rPr lang="en-US" dirty="0"/>
               <a:t>Edge computing moves computation to the network edge — next to factories, hospitals, and vehicles.</a:t>
             </a:r>
-            <a:endParaRPr lang="en-US" dirty="0"/>
           </a:p>
         </p:txBody>
       </p:sp>
@@ -1403,7 +1195,6 @@
               <a:rPr lang="en-US" dirty="0"/>
               <a:t>The key insight: latency-sensitive tasks (millisecond control) happen at the edge; long-horizon tasks (analytics, training) happen in the cloud.</a:t>
             </a:r>
-            <a:endParaRPr lang="en-US" dirty="0"/>
           </a:p>
         </p:txBody>
       </p:sp>
@@ -1491,7 +1282,6 @@
               <a:rPr lang="en-US" dirty="0"/>
               <a:t>These four benefits make edge computing indispensable for industrial real-time systems.</a:t>
             </a:r>
-            <a:endParaRPr lang="en-US" dirty="0"/>
           </a:p>
         </p:txBody>
       </p:sp>
@@ -1579,7 +1369,6 @@
               <a:rPr lang="en-US" dirty="0"/>
               <a:t>Edge and cloud are complementary, not competing. The hybrid model uses each for what it does best.</a:t>
             </a:r>
-            <a:endParaRPr lang="en-US" dirty="0"/>
           </a:p>
         </p:txBody>
       </p:sp>
@@ -1667,7 +1456,6 @@
               <a:rPr lang="en-US" dirty="0"/>
               <a:t>Edge computing is now deployed across virtually every sector where timely local decisions matter.</a:t>
             </a:r>
-            <a:endParaRPr lang="en-US" dirty="0"/>
           </a:p>
         </p:txBody>
       </p:sp>
@@ -1755,7 +1543,6 @@
               <a:rPr lang="en-US" dirty="0"/>
               <a:t>The experiment used a Flask server on an Ubuntu 22.04 laptop as the edge node and httpbin.org as the cloud endpoint.</a:t>
             </a:r>
-            <a:endParaRPr lang="en-US" dirty="0"/>
           </a:p>
         </p:txBody>
       </p:sp>
@@ -1843,7 +1630,6 @@
               <a:rPr lang="en-US" dirty="0"/>
               <a:t>At home, edge is 5.4× faster; under HSHL shared WiFi, edge is still 5.1× faster than cloud.</a:t>
             </a:r>
-            <a:endParaRPr lang="en-US" dirty="0"/>
           </a:p>
         </p:txBody>
       </p:sp>
@@ -1916,6 +1702,11 @@
 <file path=ppt/slideMasters/slideMaster1.xml><?xml version="1.0" encoding="utf-8"?>
 <p:sldMaster xmlns:a="http://schemas.openxmlformats.org/drawingml/2006/main" xmlns:r="http://schemas.openxmlformats.org/officeDocument/2006/relationships" xmlns:p="http://schemas.openxmlformats.org/presentationml/2006/main">
   <p:cSld>
+    <p:bg>
+      <p:bgRef idx="1001">
+        <a:schemeClr val="bg1"/>
+      </p:bgRef>
+    </p:bg>
     <p:spTree>
       <p:nvGrpSpPr>
         <p:cNvPr id="1" name=""/>
@@ -2198,6 +1989,7 @@
         <a:solidFill>
           <a:srgbClr val="021B2E"/>
         </a:solidFill>
+        <a:effectLst/>
       </p:bgPr>
     </p:bg>
     <p:spTree>
@@ -2238,17 +2030,24 @@
             <a:prstDash val="solid"/>
           </a:ln>
         </p:spPr>
+        <p:txBody>
+          <a:bodyPr/>
+          <a:lstStyle/>
+          <a:p>
+            <a:endParaRPr lang="en-DE"/>
+          </a:p>
+        </p:txBody>
       </p:sp>
       <p:pic>
         <p:nvPicPr>
-          <p:cNvPr id="3" name="Image 0" descr="preencoded.png">    </p:cNvPr>
+          <p:cNvPr id="3" name="Image 0" descr="preencoded.png"/>
           <p:cNvPicPr>
             <a:picLocks noChangeAspect="1"/>
           </p:cNvPicPr>
           <p:nvPr/>
         </p:nvPicPr>
         <p:blipFill>
-          <a:blip r:embed="rId1"/>
+          <a:blip r:embed="rId3"/>
           <a:stretch>
             <a:fillRect/>
           </a:stretch>
@@ -2284,11 +2083,11 @@
           <a:bodyPr wrap="square" lIns="0" tIns="0" rIns="0" bIns="0" rtlCol="0" anchor="ctr"/>
           <a:lstStyle/>
           <a:p>
-            <a:pPr indent="0" marL="0">
-              <a:buNone/>
-            </a:pPr>
-            <a:r>
-              <a:rPr lang="en-US" sz="1300" b="1" spc="600" kern="0" dirty="0">
+            <a:pPr marL="0" indent="0">
+              <a:buNone/>
+            </a:pPr>
+            <a:r>
+              <a:rPr lang="en-US" sz="1300" b="1" kern="0" spc="600" dirty="0">
                 <a:solidFill>
                   <a:srgbClr val="02C39A"/>
                 </a:solidFill>
@@ -2323,7 +2122,7 @@
           <a:bodyPr wrap="square" lIns="0" tIns="0" rIns="0" bIns="0" rtlCol="0" anchor="ctr"/>
           <a:lstStyle/>
           <a:p>
-            <a:pPr indent="0" marL="0">
+            <a:pPr marL="0" indent="0">
               <a:buNone/>
             </a:pPr>
             <a:r>
@@ -2362,7 +2161,7 @@
           <a:bodyPr wrap="square" lIns="0" tIns="0" rIns="0" bIns="0" rtlCol="0" anchor="ctr"/>
           <a:lstStyle/>
           <a:p>
-            <a:pPr indent="0" marL="0">
+            <a:pPr marL="0" indent="0">
               <a:buNone/>
             </a:pPr>
             <a:r>
@@ -2401,7 +2200,7 @@
           <a:bodyPr wrap="square" lIns="0" tIns="0" rIns="0" bIns="0" rtlCol="0" anchor="ctr"/>
           <a:lstStyle/>
           <a:p>
-            <a:pPr indent="0" marL="0">
+            <a:pPr marL="0" indent="0">
               <a:buNone/>
             </a:pPr>
             <a:r>
@@ -2415,9 +2214,6 @@
               </a:rPr>
               <a:t>Barua · Rahman · Kapil · Chowdhury</a:t>
             </a:r>
-            <a:pPr indent="0" marL="0">
-              <a:buNone/>
-            </a:pPr>
             <a:r>
               <a:rPr lang="en-US" sz="1100" dirty="0">
                 <a:solidFill>
@@ -2449,6 +2245,7 @@
         <a:solidFill>
           <a:srgbClr val="F0F7FC"/>
         </a:solidFill>
+        <a:effectLst/>
       </p:bgPr>
     </p:bg>
     <p:spTree>
@@ -2486,7 +2283,7 @@
           <a:bodyPr wrap="square" lIns="0" tIns="0" rIns="0" bIns="0" rtlCol="0" anchor="ctr"/>
           <a:lstStyle/>
           <a:p>
-            <a:pPr indent="0" marL="0">
+            <a:pPr marL="0" indent="0">
               <a:buNone/>
             </a:pPr>
             <a:r>
@@ -2525,13 +2322,20 @@
           </a:solidFill>
           <a:ln/>
           <a:effectLst>
-            <a:outerShdw sx="100000" sy="100000" kx="0" ky="0" algn="bl" rotWithShape="0" blurRad="127000" dist="38100" dir="2700000">
+            <a:outerShdw blurRad="127000" dist="38100" dir="2700000" algn="bl" rotWithShape="0">
               <a:srgbClr val="000000">
                 <a:alpha val="8000"/>
               </a:srgbClr>
             </a:outerShdw>
           </a:effectLst>
         </p:spPr>
+        <p:txBody>
+          <a:bodyPr/>
+          <a:lstStyle/>
+          <a:p>
+            <a:endParaRPr lang="en-DE"/>
+          </a:p>
+        </p:txBody>
       </p:sp>
       <p:sp>
         <p:nvSpPr>
@@ -2554,7 +2358,7 @@
           <a:bodyPr wrap="square" lIns="0" tIns="0" rIns="0" bIns="0" rtlCol="0" anchor="ctr"/>
           <a:lstStyle/>
           <a:p>
-            <a:pPr algn="ctr" indent="0" marL="0">
+            <a:pPr marL="0" indent="0" algn="ctr">
               <a:buNone/>
             </a:pPr>
             <a:r>
@@ -2593,7 +2397,7 @@
           <a:bodyPr wrap="square" lIns="0" tIns="0" rIns="0" bIns="0" rtlCol="0" anchor="ctr"/>
           <a:lstStyle/>
           <a:p>
-            <a:pPr indent="0" marL="0">
+            <a:pPr marL="0" indent="0">
               <a:buNone/>
             </a:pPr>
             <a:r>
@@ -2632,7 +2436,7 @@
           <a:bodyPr wrap="square" lIns="0" tIns="0" rIns="0" bIns="0" rtlCol="0" anchor="ctr"/>
           <a:lstStyle/>
           <a:p>
-            <a:pPr indent="0" marL="0">
+            <a:pPr marL="0" indent="0">
               <a:buNone/>
             </a:pPr>
             <a:r>
@@ -2671,13 +2475,20 @@
           </a:solidFill>
           <a:ln/>
           <a:effectLst>
-            <a:outerShdw sx="100000" sy="100000" kx="0" ky="0" algn="bl" rotWithShape="0" blurRad="127000" dist="38100" dir="2700000">
+            <a:outerShdw blurRad="127000" dist="38100" dir="2700000" algn="bl" rotWithShape="0">
               <a:srgbClr val="000000">
                 <a:alpha val="8000"/>
               </a:srgbClr>
             </a:outerShdw>
           </a:effectLst>
         </p:spPr>
+        <p:txBody>
+          <a:bodyPr/>
+          <a:lstStyle/>
+          <a:p>
+            <a:endParaRPr lang="en-DE"/>
+          </a:p>
+        </p:txBody>
       </p:sp>
       <p:sp>
         <p:nvSpPr>
@@ -2700,7 +2511,7 @@
           <a:bodyPr wrap="square" lIns="0" tIns="0" rIns="0" bIns="0" rtlCol="0" anchor="ctr"/>
           <a:lstStyle/>
           <a:p>
-            <a:pPr algn="ctr" indent="0" marL="0">
+            <a:pPr marL="0" indent="0" algn="ctr">
               <a:buNone/>
             </a:pPr>
             <a:r>
@@ -2739,7 +2550,7 @@
           <a:bodyPr wrap="square" lIns="0" tIns="0" rIns="0" bIns="0" rtlCol="0" anchor="ctr"/>
           <a:lstStyle/>
           <a:p>
-            <a:pPr indent="0" marL="0">
+            <a:pPr marL="0" indent="0">
               <a:buNone/>
             </a:pPr>
             <a:r>
@@ -2778,7 +2589,7 @@
           <a:bodyPr wrap="square" lIns="0" tIns="0" rIns="0" bIns="0" rtlCol="0" anchor="ctr"/>
           <a:lstStyle/>
           <a:p>
-            <a:pPr indent="0" marL="0">
+            <a:pPr marL="0" indent="0">
               <a:buNone/>
             </a:pPr>
             <a:r>
@@ -2817,13 +2628,20 @@
           </a:solidFill>
           <a:ln/>
           <a:effectLst>
-            <a:outerShdw sx="100000" sy="100000" kx="0" ky="0" algn="bl" rotWithShape="0" blurRad="127000" dist="38100" dir="2700000">
+            <a:outerShdw blurRad="127000" dist="38100" dir="2700000" algn="bl" rotWithShape="0">
               <a:srgbClr val="000000">
                 <a:alpha val="8000"/>
               </a:srgbClr>
             </a:outerShdw>
           </a:effectLst>
         </p:spPr>
+        <p:txBody>
+          <a:bodyPr/>
+          <a:lstStyle/>
+          <a:p>
+            <a:endParaRPr lang="en-DE"/>
+          </a:p>
+        </p:txBody>
       </p:sp>
       <p:sp>
         <p:nvSpPr>
@@ -2846,7 +2664,7 @@
           <a:bodyPr wrap="square" lIns="0" tIns="0" rIns="0" bIns="0" rtlCol="0" anchor="ctr"/>
           <a:lstStyle/>
           <a:p>
-            <a:pPr algn="ctr" indent="0" marL="0">
+            <a:pPr marL="0" indent="0" algn="ctr">
               <a:buNone/>
             </a:pPr>
             <a:r>
@@ -2885,7 +2703,7 @@
           <a:bodyPr wrap="square" lIns="0" tIns="0" rIns="0" bIns="0" rtlCol="0" anchor="ctr"/>
           <a:lstStyle/>
           <a:p>
-            <a:pPr indent="0" marL="0">
+            <a:pPr marL="0" indent="0">
               <a:buNone/>
             </a:pPr>
             <a:r>
@@ -2924,7 +2742,7 @@
           <a:bodyPr wrap="square" lIns="0" tIns="0" rIns="0" bIns="0" rtlCol="0" anchor="ctr"/>
           <a:lstStyle/>
           <a:p>
-            <a:pPr indent="0" marL="0">
+            <a:pPr marL="0" indent="0">
               <a:buNone/>
             </a:pPr>
             <a:r>
@@ -2963,13 +2781,20 @@
           </a:solidFill>
           <a:ln/>
           <a:effectLst>
-            <a:outerShdw sx="100000" sy="100000" kx="0" ky="0" algn="bl" rotWithShape="0" blurRad="127000" dist="38100" dir="2700000">
+            <a:outerShdw blurRad="127000" dist="38100" dir="2700000" algn="bl" rotWithShape="0">
               <a:srgbClr val="000000">
                 <a:alpha val="8000"/>
               </a:srgbClr>
             </a:outerShdw>
           </a:effectLst>
         </p:spPr>
+        <p:txBody>
+          <a:bodyPr/>
+          <a:lstStyle/>
+          <a:p>
+            <a:endParaRPr lang="en-DE"/>
+          </a:p>
+        </p:txBody>
       </p:sp>
       <p:sp>
         <p:nvSpPr>
@@ -2992,7 +2817,7 @@
           <a:bodyPr wrap="square" lIns="0" tIns="0" rIns="0" bIns="0" rtlCol="0" anchor="ctr"/>
           <a:lstStyle/>
           <a:p>
-            <a:pPr algn="ctr" indent="0" marL="0">
+            <a:pPr marL="0" indent="0" algn="ctr">
               <a:buNone/>
             </a:pPr>
             <a:r>
@@ -3031,7 +2856,7 @@
           <a:bodyPr wrap="square" lIns="0" tIns="0" rIns="0" bIns="0" rtlCol="0" anchor="ctr"/>
           <a:lstStyle/>
           <a:p>
-            <a:pPr indent="0" marL="0">
+            <a:pPr marL="0" indent="0">
               <a:buNone/>
             </a:pPr>
             <a:r>
@@ -3070,7 +2895,7 @@
           <a:bodyPr wrap="square" lIns="0" tIns="0" rIns="0" bIns="0" rtlCol="0" anchor="ctr"/>
           <a:lstStyle/>
           <a:p>
-            <a:pPr indent="0" marL="0">
+            <a:pPr marL="0" indent="0">
               <a:buNone/>
             </a:pPr>
             <a:r>
@@ -3104,6 +2929,7 @@
         <a:solidFill>
           <a:srgbClr val="FFFFFF"/>
         </a:solidFill>
+        <a:effectLst/>
       </p:bgPr>
     </p:bg>
     <p:spTree>
@@ -3141,7 +2967,7 @@
           <a:bodyPr wrap="square" lIns="0" tIns="0" rIns="0" bIns="0" rtlCol="0" anchor="ctr"/>
           <a:lstStyle/>
           <a:p>
-            <a:pPr indent="0" marL="0">
+            <a:pPr marL="0" indent="0">
               <a:buNone/>
             </a:pPr>
             <a:r>
@@ -3185,13 +3011,20 @@
             <a:prstDash val="solid"/>
           </a:ln>
           <a:effectLst>
-            <a:outerShdw sx="100000" sy="100000" kx="0" ky="0" algn="bl" rotWithShape="0" blurRad="101600" dist="25400" dir="2700000">
+            <a:outerShdw blurRad="101600" dist="25400" dir="2700000" algn="bl" rotWithShape="0">
               <a:srgbClr val="000000">
                 <a:alpha val="8000"/>
               </a:srgbClr>
             </a:outerShdw>
           </a:effectLst>
         </p:spPr>
+        <p:txBody>
+          <a:bodyPr/>
+          <a:lstStyle/>
+          <a:p>
+            <a:endParaRPr lang="en-DE"/>
+          </a:p>
+        </p:txBody>
       </p:sp>
       <p:sp>
         <p:nvSpPr>
@@ -3217,17 +3050,24 @@
             <a:prstDash val="solid"/>
           </a:ln>
         </p:spPr>
+        <p:txBody>
+          <a:bodyPr/>
+          <a:lstStyle/>
+          <a:p>
+            <a:endParaRPr lang="en-DE"/>
+          </a:p>
+        </p:txBody>
       </p:sp>
       <p:pic>
         <p:nvPicPr>
-          <p:cNvPr id="5" name="Image 0" descr="preencoded.png">    </p:cNvPr>
+          <p:cNvPr id="5" name="Image 0" descr="preencoded.png"/>
           <p:cNvPicPr>
             <a:picLocks noChangeAspect="1"/>
           </p:cNvPicPr>
           <p:nvPr/>
         </p:nvPicPr>
         <p:blipFill>
-          <a:blip r:embed="rId1"/>
+          <a:blip r:embed="rId3"/>
           <a:stretch>
             <a:fillRect/>
           </a:stretch>
@@ -3263,7 +3103,7 @@
           <a:bodyPr wrap="square" lIns="0" tIns="0" rIns="0" bIns="0" rtlCol="0" anchor="ctr"/>
           <a:lstStyle/>
           <a:p>
-            <a:pPr indent="0" marL="0">
+            <a:pPr marL="0" indent="0">
               <a:buNone/>
             </a:pPr>
             <a:r>
@@ -3302,7 +3142,7 @@
           <a:bodyPr wrap="square" lIns="0" tIns="0" rIns="0" bIns="0" rtlCol="0" anchor="ctr"/>
           <a:lstStyle/>
           <a:p>
-            <a:pPr indent="0" marL="0">
+            <a:pPr marL="0" indent="0">
               <a:buNone/>
             </a:pPr>
             <a:r>
@@ -3346,13 +3186,20 @@
             <a:prstDash val="solid"/>
           </a:ln>
           <a:effectLst>
-            <a:outerShdw sx="100000" sy="100000" kx="0" ky="0" algn="bl" rotWithShape="0" blurRad="101600" dist="25400" dir="2700000">
+            <a:outerShdw blurRad="101600" dist="25400" dir="2700000" algn="bl" rotWithShape="0">
               <a:srgbClr val="000000">
                 <a:alpha val="8000"/>
               </a:srgbClr>
             </a:outerShdw>
           </a:effectLst>
         </p:spPr>
+        <p:txBody>
+          <a:bodyPr/>
+          <a:lstStyle/>
+          <a:p>
+            <a:endParaRPr lang="en-DE"/>
+          </a:p>
+        </p:txBody>
       </p:sp>
       <p:sp>
         <p:nvSpPr>
@@ -3378,17 +3225,24 @@
             <a:prstDash val="solid"/>
           </a:ln>
         </p:spPr>
+        <p:txBody>
+          <a:bodyPr/>
+          <a:lstStyle/>
+          <a:p>
+            <a:endParaRPr lang="en-DE"/>
+          </a:p>
+        </p:txBody>
       </p:sp>
       <p:pic>
         <p:nvPicPr>
-          <p:cNvPr id="10" name="Image 1" descr="preencoded.png">    </p:cNvPr>
+          <p:cNvPr id="10" name="Image 1" descr="preencoded.png"/>
           <p:cNvPicPr>
             <a:picLocks noChangeAspect="1"/>
           </p:cNvPicPr>
           <p:nvPr/>
         </p:nvPicPr>
         <p:blipFill>
-          <a:blip r:embed="rId2"/>
+          <a:blip r:embed="rId4"/>
           <a:stretch>
             <a:fillRect/>
           </a:stretch>
@@ -3424,7 +3278,7 @@
           <a:bodyPr wrap="square" lIns="0" tIns="0" rIns="0" bIns="0" rtlCol="0" anchor="ctr"/>
           <a:lstStyle/>
           <a:p>
-            <a:pPr indent="0" marL="0">
+            <a:pPr marL="0" indent="0">
               <a:buNone/>
             </a:pPr>
             <a:r>
@@ -3463,7 +3317,7 @@
           <a:bodyPr wrap="square" lIns="0" tIns="0" rIns="0" bIns="0" rtlCol="0" anchor="ctr"/>
           <a:lstStyle/>
           <a:p>
-            <a:pPr indent="0" marL="0">
+            <a:pPr marL="0" indent="0">
               <a:buNone/>
             </a:pPr>
             <a:r>
@@ -3507,13 +3361,20 @@
             <a:prstDash val="solid"/>
           </a:ln>
           <a:effectLst>
-            <a:outerShdw sx="100000" sy="100000" kx="0" ky="0" algn="bl" rotWithShape="0" blurRad="101600" dist="25400" dir="2700000">
+            <a:outerShdw blurRad="101600" dist="25400" dir="2700000" algn="bl" rotWithShape="0">
               <a:srgbClr val="000000">
                 <a:alpha val="8000"/>
               </a:srgbClr>
             </a:outerShdw>
           </a:effectLst>
         </p:spPr>
+        <p:txBody>
+          <a:bodyPr/>
+          <a:lstStyle/>
+          <a:p>
+            <a:endParaRPr lang="en-DE"/>
+          </a:p>
+        </p:txBody>
       </p:sp>
       <p:sp>
         <p:nvSpPr>
@@ -3539,17 +3400,24 @@
             <a:prstDash val="solid"/>
           </a:ln>
         </p:spPr>
+        <p:txBody>
+          <a:bodyPr/>
+          <a:lstStyle/>
+          <a:p>
+            <a:endParaRPr lang="en-DE"/>
+          </a:p>
+        </p:txBody>
       </p:sp>
       <p:pic>
         <p:nvPicPr>
-          <p:cNvPr id="15" name="Image 2" descr="preencoded.png">    </p:cNvPr>
+          <p:cNvPr id="15" name="Image 2" descr="preencoded.png"/>
           <p:cNvPicPr>
             <a:picLocks noChangeAspect="1"/>
           </p:cNvPicPr>
           <p:nvPr/>
         </p:nvPicPr>
         <p:blipFill>
-          <a:blip r:embed="rId3"/>
+          <a:blip r:embed="rId5"/>
           <a:stretch>
             <a:fillRect/>
           </a:stretch>
@@ -3585,7 +3453,7 @@
           <a:bodyPr wrap="square" lIns="0" tIns="0" rIns="0" bIns="0" rtlCol="0" anchor="ctr"/>
           <a:lstStyle/>
           <a:p>
-            <a:pPr indent="0" marL="0">
+            <a:pPr marL="0" indent="0">
               <a:buNone/>
             </a:pPr>
             <a:r>
@@ -3624,7 +3492,7 @@
           <a:bodyPr wrap="square" lIns="0" tIns="0" rIns="0" bIns="0" rtlCol="0" anchor="ctr"/>
           <a:lstStyle/>
           <a:p>
-            <a:pPr indent="0" marL="0">
+            <a:pPr marL="0" indent="0">
               <a:buNone/>
             </a:pPr>
             <a:r>
@@ -3668,13 +3536,20 @@
             <a:prstDash val="solid"/>
           </a:ln>
           <a:effectLst>
-            <a:outerShdw sx="100000" sy="100000" kx="0" ky="0" algn="bl" rotWithShape="0" blurRad="101600" dist="25400" dir="2700000">
+            <a:outerShdw blurRad="101600" dist="25400" dir="2700000" algn="bl" rotWithShape="0">
               <a:srgbClr val="000000">
                 <a:alpha val="8000"/>
               </a:srgbClr>
             </a:outerShdw>
           </a:effectLst>
         </p:spPr>
+        <p:txBody>
+          <a:bodyPr/>
+          <a:lstStyle/>
+          <a:p>
+            <a:endParaRPr lang="en-DE"/>
+          </a:p>
+        </p:txBody>
       </p:sp>
       <p:sp>
         <p:nvSpPr>
@@ -3700,17 +3575,24 @@
             <a:prstDash val="solid"/>
           </a:ln>
         </p:spPr>
+        <p:txBody>
+          <a:bodyPr/>
+          <a:lstStyle/>
+          <a:p>
+            <a:endParaRPr lang="en-DE"/>
+          </a:p>
+        </p:txBody>
       </p:sp>
       <p:pic>
         <p:nvPicPr>
-          <p:cNvPr id="20" name="Image 3" descr="preencoded.png">    </p:cNvPr>
+          <p:cNvPr id="20" name="Image 3" descr="preencoded.png"/>
           <p:cNvPicPr>
             <a:picLocks noChangeAspect="1"/>
           </p:cNvPicPr>
           <p:nvPr/>
         </p:nvPicPr>
         <p:blipFill>
-          <a:blip r:embed="rId4"/>
+          <a:blip r:embed="rId6"/>
           <a:stretch>
             <a:fillRect/>
           </a:stretch>
@@ -3746,7 +3628,7 @@
           <a:bodyPr wrap="square" lIns="0" tIns="0" rIns="0" bIns="0" rtlCol="0" anchor="ctr"/>
           <a:lstStyle/>
           <a:p>
-            <a:pPr indent="0" marL="0">
+            <a:pPr marL="0" indent="0">
               <a:buNone/>
             </a:pPr>
             <a:r>
@@ -3785,7 +3667,7 @@
           <a:bodyPr wrap="square" lIns="0" tIns="0" rIns="0" bIns="0" rtlCol="0" anchor="ctr"/>
           <a:lstStyle/>
           <a:p>
-            <a:pPr indent="0" marL="0">
+            <a:pPr marL="0" indent="0">
               <a:buNone/>
             </a:pPr>
             <a:r>
@@ -3819,6 +3701,7 @@
         <a:solidFill>
           <a:srgbClr val="021B2E"/>
         </a:solidFill>
+        <a:effectLst/>
       </p:bgPr>
     </p:bg>
     <p:spTree>
@@ -3859,6 +3742,13 @@
             <a:prstDash val="solid"/>
           </a:ln>
         </p:spPr>
+        <p:txBody>
+          <a:bodyPr/>
+          <a:lstStyle/>
+          <a:p>
+            <a:endParaRPr lang="en-DE"/>
+          </a:p>
+        </p:txBody>
       </p:sp>
       <p:sp>
         <p:nvSpPr>
@@ -3881,7 +3771,7 @@
           <a:bodyPr wrap="square" lIns="0" tIns="0" rIns="0" bIns="0" rtlCol="0" anchor="ctr"/>
           <a:lstStyle/>
           <a:p>
-            <a:pPr indent="0" marL="0">
+            <a:pPr marL="0" indent="0">
               <a:buNone/>
             </a:pPr>
             <a:r>
@@ -3923,6 +3813,13 @@
             <a:prstDash val="solid"/>
           </a:ln>
         </p:spPr>
+        <p:txBody>
+          <a:bodyPr/>
+          <a:lstStyle/>
+          <a:p>
+            <a:endParaRPr lang="en-DE"/>
+          </a:p>
+        </p:txBody>
       </p:sp>
       <p:sp>
         <p:nvSpPr>
@@ -3945,7 +3842,7 @@
           <a:bodyPr wrap="square" lIns="0" tIns="0" rIns="0" bIns="0" rtlCol="0" anchor="ctr"/>
           <a:lstStyle/>
           <a:p>
-            <a:pPr indent="0" marL="0">
+            <a:pPr marL="0" indent="0">
               <a:buNone/>
             </a:pPr>
             <a:r>
@@ -3987,6 +3884,13 @@
             <a:prstDash val="solid"/>
           </a:ln>
         </p:spPr>
+        <p:txBody>
+          <a:bodyPr/>
+          <a:lstStyle/>
+          <a:p>
+            <a:endParaRPr lang="en-DE"/>
+          </a:p>
+        </p:txBody>
       </p:sp>
       <p:sp>
         <p:nvSpPr>
@@ -4009,7 +3913,7 @@
           <a:bodyPr wrap="square" lIns="0" tIns="0" rIns="0" bIns="0" rtlCol="0" anchor="ctr"/>
           <a:lstStyle/>
           <a:p>
-            <a:pPr indent="0" marL="0">
+            <a:pPr marL="0" indent="0">
               <a:buNone/>
             </a:pPr>
             <a:r>
@@ -4051,6 +3955,13 @@
             <a:prstDash val="solid"/>
           </a:ln>
         </p:spPr>
+        <p:txBody>
+          <a:bodyPr/>
+          <a:lstStyle/>
+          <a:p>
+            <a:endParaRPr lang="en-DE"/>
+          </a:p>
+        </p:txBody>
       </p:sp>
       <p:sp>
         <p:nvSpPr>
@@ -4073,7 +3984,7 @@
           <a:bodyPr wrap="square" lIns="0" tIns="0" rIns="0" bIns="0" rtlCol="0" anchor="ctr"/>
           <a:lstStyle/>
           <a:p>
-            <a:pPr indent="0" marL="0">
+            <a:pPr marL="0" indent="0">
               <a:buNone/>
             </a:pPr>
             <a:r>
@@ -4115,6 +4026,13 @@
             <a:prstDash val="solid"/>
           </a:ln>
         </p:spPr>
+        <p:txBody>
+          <a:bodyPr/>
+          <a:lstStyle/>
+          <a:p>
+            <a:endParaRPr lang="en-DE"/>
+          </a:p>
+        </p:txBody>
       </p:sp>
       <p:sp>
         <p:nvSpPr>
@@ -4137,7 +4055,7 @@
           <a:bodyPr wrap="square" lIns="0" tIns="0" rIns="0" bIns="0" rtlCol="0" anchor="ctr"/>
           <a:lstStyle/>
           <a:p>
-            <a:pPr indent="0" marL="0">
+            <a:pPr marL="0" indent="0">
               <a:buNone/>
             </a:pPr>
             <a:r>
@@ -4179,6 +4097,13 @@
             <a:prstDash val="solid"/>
           </a:ln>
         </p:spPr>
+        <p:txBody>
+          <a:bodyPr/>
+          <a:lstStyle/>
+          <a:p>
+            <a:endParaRPr lang="en-DE"/>
+          </a:p>
+        </p:txBody>
       </p:sp>
       <p:sp>
         <p:nvSpPr>
@@ -4201,7 +4126,7 @@
           <a:bodyPr wrap="square" lIns="0" tIns="0" rIns="0" bIns="0" rtlCol="0" anchor="ctr"/>
           <a:lstStyle/>
           <a:p>
-            <a:pPr indent="0" marL="0">
+            <a:pPr marL="0" indent="0">
               <a:buNone/>
             </a:pPr>
             <a:r>
@@ -4240,7 +4165,7 @@
           <a:bodyPr wrap="square" lIns="0" tIns="0" rIns="0" bIns="0" rtlCol="0" anchor="ctr"/>
           <a:lstStyle/>
           <a:p>
-            <a:pPr algn="ctr" indent="0" marL="0">
+            <a:pPr marL="0" indent="0" algn="ctr">
               <a:buNone/>
             </a:pPr>
             <a:r>
@@ -4279,7 +4204,7 @@
           <a:bodyPr wrap="square" lIns="0" tIns="0" rIns="0" bIns="0" rtlCol="0" anchor="ctr"/>
           <a:lstStyle/>
           <a:p>
-            <a:pPr algn="ctr" indent="0" marL="0">
+            <a:pPr marL="0" indent="0" algn="ctr">
               <a:buNone/>
             </a:pPr>
             <a:r>
@@ -4313,6 +4238,7 @@
         <a:solidFill>
           <a:srgbClr val="F0F7FC"/>
         </a:solidFill>
+        <a:effectLst/>
       </p:bgPr>
     </p:bg>
     <p:spTree>
@@ -4350,7 +4276,7 @@
           <a:bodyPr wrap="square" lIns="0" tIns="0" rIns="0" bIns="0" rtlCol="0" anchor="ctr"/>
           <a:lstStyle/>
           <a:p>
-            <a:pPr indent="0" marL="0">
+            <a:pPr marL="0" indent="0">
               <a:buNone/>
             </a:pPr>
             <a:r>
@@ -4389,13 +4315,20 @@
           </a:solidFill>
           <a:ln/>
           <a:effectLst>
-            <a:outerShdw sx="100000" sy="100000" kx="0" ky="0" algn="bl" rotWithShape="0" blurRad="101600" dist="25400" dir="2700000">
+            <a:outerShdw blurRad="101600" dist="25400" dir="2700000" algn="bl" rotWithShape="0">
               <a:srgbClr val="000000">
                 <a:alpha val="8000"/>
               </a:srgbClr>
             </a:outerShdw>
           </a:effectLst>
         </p:spPr>
+        <p:txBody>
+          <a:bodyPr/>
+          <a:lstStyle/>
+          <a:p>
+            <a:endParaRPr lang="en-DE"/>
+          </a:p>
+        </p:txBody>
       </p:sp>
       <p:sp>
         <p:nvSpPr>
@@ -4423,6 +4356,13 @@
             <a:prstDash val="solid"/>
           </a:ln>
         </p:spPr>
+        <p:txBody>
+          <a:bodyPr/>
+          <a:lstStyle/>
+          <a:p>
+            <a:endParaRPr lang="en-DE"/>
+          </a:p>
+        </p:txBody>
       </p:sp>
       <p:sp>
         <p:nvSpPr>
@@ -4445,7 +4385,7 @@
           <a:bodyPr wrap="square" lIns="0" tIns="0" rIns="0" bIns="0" rtlCol="0" anchor="ctr"/>
           <a:lstStyle/>
           <a:p>
-            <a:pPr algn="ctr" indent="0" marL="0">
+            <a:pPr marL="0" indent="0" algn="ctr">
               <a:buNone/>
             </a:pPr>
             <a:r>
@@ -4484,7 +4424,7 @@
           <a:bodyPr wrap="square" lIns="0" tIns="0" rIns="0" bIns="0" rtlCol="0" anchor="ctr"/>
           <a:lstStyle/>
           <a:p>
-            <a:pPr indent="0" marL="0">
+            <a:pPr marL="0" indent="0">
               <a:buNone/>
             </a:pPr>
             <a:r>
@@ -4523,7 +4463,7 @@
           <a:bodyPr wrap="square" lIns="0" tIns="0" rIns="0" bIns="0" rtlCol="0" anchor="ctr"/>
           <a:lstStyle/>
           <a:p>
-            <a:pPr indent="0" marL="0">
+            <a:pPr marL="0" indent="0">
               <a:buNone/>
             </a:pPr>
             <a:r>
@@ -4562,13 +4502,20 @@
           </a:solidFill>
           <a:ln/>
           <a:effectLst>
-            <a:outerShdw sx="100000" sy="100000" kx="0" ky="0" algn="bl" rotWithShape="0" blurRad="101600" dist="25400" dir="2700000">
+            <a:outerShdw blurRad="101600" dist="25400" dir="2700000" algn="bl" rotWithShape="0">
               <a:srgbClr val="000000">
                 <a:alpha val="8000"/>
               </a:srgbClr>
             </a:outerShdw>
           </a:effectLst>
         </p:spPr>
+        <p:txBody>
+          <a:bodyPr/>
+          <a:lstStyle/>
+          <a:p>
+            <a:endParaRPr lang="en-DE"/>
+          </a:p>
+        </p:txBody>
       </p:sp>
       <p:sp>
         <p:nvSpPr>
@@ -4596,6 +4543,13 @@
             <a:prstDash val="solid"/>
           </a:ln>
         </p:spPr>
+        <p:txBody>
+          <a:bodyPr/>
+          <a:lstStyle/>
+          <a:p>
+            <a:endParaRPr lang="en-DE"/>
+          </a:p>
+        </p:txBody>
       </p:sp>
       <p:sp>
         <p:nvSpPr>
@@ -4618,7 +4572,7 @@
           <a:bodyPr wrap="square" lIns="0" tIns="0" rIns="0" bIns="0" rtlCol="0" anchor="ctr"/>
           <a:lstStyle/>
           <a:p>
-            <a:pPr algn="ctr" indent="0" marL="0">
+            <a:pPr marL="0" indent="0" algn="ctr">
               <a:buNone/>
             </a:pPr>
             <a:r>
@@ -4657,7 +4611,7 @@
           <a:bodyPr wrap="square" lIns="0" tIns="0" rIns="0" bIns="0" rtlCol="0" anchor="ctr"/>
           <a:lstStyle/>
           <a:p>
-            <a:pPr indent="0" marL="0">
+            <a:pPr marL="0" indent="0">
               <a:buNone/>
             </a:pPr>
             <a:r>
@@ -4696,7 +4650,7 @@
           <a:bodyPr wrap="square" lIns="0" tIns="0" rIns="0" bIns="0" rtlCol="0" anchor="ctr"/>
           <a:lstStyle/>
           <a:p>
-            <a:pPr indent="0" marL="0">
+            <a:pPr marL="0" indent="0">
               <a:buNone/>
             </a:pPr>
             <a:r>
@@ -4735,13 +4689,20 @@
           </a:solidFill>
           <a:ln/>
           <a:effectLst>
-            <a:outerShdw sx="100000" sy="100000" kx="0" ky="0" algn="bl" rotWithShape="0" blurRad="101600" dist="25400" dir="2700000">
+            <a:outerShdw blurRad="101600" dist="25400" dir="2700000" algn="bl" rotWithShape="0">
               <a:srgbClr val="000000">
                 <a:alpha val="8000"/>
               </a:srgbClr>
             </a:outerShdw>
           </a:effectLst>
         </p:spPr>
+        <p:txBody>
+          <a:bodyPr/>
+          <a:lstStyle/>
+          <a:p>
+            <a:endParaRPr lang="en-DE"/>
+          </a:p>
+        </p:txBody>
       </p:sp>
       <p:sp>
         <p:nvSpPr>
@@ -4769,6 +4730,13 @@
             <a:prstDash val="solid"/>
           </a:ln>
         </p:spPr>
+        <p:txBody>
+          <a:bodyPr/>
+          <a:lstStyle/>
+          <a:p>
+            <a:endParaRPr lang="en-DE"/>
+          </a:p>
+        </p:txBody>
       </p:sp>
       <p:sp>
         <p:nvSpPr>
@@ -4791,7 +4759,7 @@
           <a:bodyPr wrap="square" lIns="0" tIns="0" rIns="0" bIns="0" rtlCol="0" anchor="ctr"/>
           <a:lstStyle/>
           <a:p>
-            <a:pPr algn="ctr" indent="0" marL="0">
+            <a:pPr marL="0" indent="0" algn="ctr">
               <a:buNone/>
             </a:pPr>
             <a:r>
@@ -4830,7 +4798,7 @@
           <a:bodyPr wrap="square" lIns="0" tIns="0" rIns="0" bIns="0" rtlCol="0" anchor="ctr"/>
           <a:lstStyle/>
           <a:p>
-            <a:pPr indent="0" marL="0">
+            <a:pPr marL="0" indent="0">
               <a:buNone/>
             </a:pPr>
             <a:r>
@@ -4869,7 +4837,7 @@
           <a:bodyPr wrap="square" lIns="0" tIns="0" rIns="0" bIns="0" rtlCol="0" anchor="ctr"/>
           <a:lstStyle/>
           <a:p>
-            <a:pPr indent="0" marL="0">
+            <a:pPr marL="0" indent="0">
               <a:buNone/>
             </a:pPr>
             <a:r>
@@ -4908,13 +4876,20 @@
           </a:solidFill>
           <a:ln/>
           <a:effectLst>
-            <a:outerShdw sx="100000" sy="100000" kx="0" ky="0" algn="bl" rotWithShape="0" blurRad="101600" dist="25400" dir="2700000">
+            <a:outerShdw blurRad="101600" dist="25400" dir="2700000" algn="bl" rotWithShape="0">
               <a:srgbClr val="000000">
                 <a:alpha val="8000"/>
               </a:srgbClr>
             </a:outerShdw>
           </a:effectLst>
         </p:spPr>
+        <p:txBody>
+          <a:bodyPr/>
+          <a:lstStyle/>
+          <a:p>
+            <a:endParaRPr lang="en-DE"/>
+          </a:p>
+        </p:txBody>
       </p:sp>
       <p:sp>
         <p:nvSpPr>
@@ -4942,6 +4917,13 @@
             <a:prstDash val="solid"/>
           </a:ln>
         </p:spPr>
+        <p:txBody>
+          <a:bodyPr/>
+          <a:lstStyle/>
+          <a:p>
+            <a:endParaRPr lang="en-DE"/>
+          </a:p>
+        </p:txBody>
       </p:sp>
       <p:sp>
         <p:nvSpPr>
@@ -4964,7 +4946,7 @@
           <a:bodyPr wrap="square" lIns="0" tIns="0" rIns="0" bIns="0" rtlCol="0" anchor="ctr"/>
           <a:lstStyle/>
           <a:p>
-            <a:pPr algn="ctr" indent="0" marL="0">
+            <a:pPr marL="0" indent="0" algn="ctr">
               <a:buNone/>
             </a:pPr>
             <a:r>
@@ -5003,7 +4985,7 @@
           <a:bodyPr wrap="square" lIns="0" tIns="0" rIns="0" bIns="0" rtlCol="0" anchor="ctr"/>
           <a:lstStyle/>
           <a:p>
-            <a:pPr indent="0" marL="0">
+            <a:pPr marL="0" indent="0">
               <a:buNone/>
             </a:pPr>
             <a:r>
@@ -5042,7 +5024,7 @@
           <a:bodyPr wrap="square" lIns="0" tIns="0" rIns="0" bIns="0" rtlCol="0" anchor="ctr"/>
           <a:lstStyle/>
           <a:p>
-            <a:pPr indent="0" marL="0">
+            <a:pPr marL="0" indent="0">
               <a:buNone/>
             </a:pPr>
             <a:r>
@@ -5081,13 +5063,20 @@
           </a:solidFill>
           <a:ln/>
           <a:effectLst>
-            <a:outerShdw sx="100000" sy="100000" kx="0" ky="0" algn="bl" rotWithShape="0" blurRad="101600" dist="25400" dir="2700000">
+            <a:outerShdw blurRad="101600" dist="25400" dir="2700000" algn="bl" rotWithShape="0">
               <a:srgbClr val="000000">
                 <a:alpha val="8000"/>
               </a:srgbClr>
             </a:outerShdw>
           </a:effectLst>
         </p:spPr>
+        <p:txBody>
+          <a:bodyPr/>
+          <a:lstStyle/>
+          <a:p>
+            <a:endParaRPr lang="en-DE"/>
+          </a:p>
+        </p:txBody>
       </p:sp>
       <p:sp>
         <p:nvSpPr>
@@ -5115,6 +5104,13 @@
             <a:prstDash val="solid"/>
           </a:ln>
         </p:spPr>
+        <p:txBody>
+          <a:bodyPr/>
+          <a:lstStyle/>
+          <a:p>
+            <a:endParaRPr lang="en-DE"/>
+          </a:p>
+        </p:txBody>
       </p:sp>
       <p:sp>
         <p:nvSpPr>
@@ -5137,7 +5133,7 @@
           <a:bodyPr wrap="square" lIns="0" tIns="0" rIns="0" bIns="0" rtlCol="0" anchor="ctr"/>
           <a:lstStyle/>
           <a:p>
-            <a:pPr algn="ctr" indent="0" marL="0">
+            <a:pPr marL="0" indent="0" algn="ctr">
               <a:buNone/>
             </a:pPr>
             <a:r>
@@ -5176,7 +5172,7 @@
           <a:bodyPr wrap="square" lIns="0" tIns="0" rIns="0" bIns="0" rtlCol="0" anchor="ctr"/>
           <a:lstStyle/>
           <a:p>
-            <a:pPr indent="0" marL="0">
+            <a:pPr marL="0" indent="0">
               <a:buNone/>
             </a:pPr>
             <a:r>
@@ -5215,7 +5211,7 @@
           <a:bodyPr wrap="square" lIns="0" tIns="0" rIns="0" bIns="0" rtlCol="0" anchor="ctr"/>
           <a:lstStyle/>
           <a:p>
-            <a:pPr indent="0" marL="0">
+            <a:pPr marL="0" indent="0">
               <a:buNone/>
             </a:pPr>
             <a:r>
@@ -5254,13 +5250,20 @@
           </a:solidFill>
           <a:ln/>
           <a:effectLst>
-            <a:outerShdw sx="100000" sy="100000" kx="0" ky="0" algn="bl" rotWithShape="0" blurRad="101600" dist="25400" dir="2700000">
+            <a:outerShdw blurRad="101600" dist="25400" dir="2700000" algn="bl" rotWithShape="0">
               <a:srgbClr val="000000">
                 <a:alpha val="8000"/>
               </a:srgbClr>
             </a:outerShdw>
           </a:effectLst>
         </p:spPr>
+        <p:txBody>
+          <a:bodyPr/>
+          <a:lstStyle/>
+          <a:p>
+            <a:endParaRPr lang="en-DE"/>
+          </a:p>
+        </p:txBody>
       </p:sp>
       <p:sp>
         <p:nvSpPr>
@@ -5288,6 +5291,13 @@
             <a:prstDash val="solid"/>
           </a:ln>
         </p:spPr>
+        <p:txBody>
+          <a:bodyPr/>
+          <a:lstStyle/>
+          <a:p>
+            <a:endParaRPr lang="en-DE"/>
+          </a:p>
+        </p:txBody>
       </p:sp>
       <p:sp>
         <p:nvSpPr>
@@ -5310,7 +5320,7 @@
           <a:bodyPr wrap="square" lIns="0" tIns="0" rIns="0" bIns="0" rtlCol="0" anchor="ctr"/>
           <a:lstStyle/>
           <a:p>
-            <a:pPr algn="ctr" indent="0" marL="0">
+            <a:pPr marL="0" indent="0" algn="ctr">
               <a:buNone/>
             </a:pPr>
             <a:r>
@@ -5349,7 +5359,7 @@
           <a:bodyPr wrap="square" lIns="0" tIns="0" rIns="0" bIns="0" rtlCol="0" anchor="ctr"/>
           <a:lstStyle/>
           <a:p>
-            <a:pPr indent="0" marL="0">
+            <a:pPr marL="0" indent="0">
               <a:buNone/>
             </a:pPr>
             <a:r>
@@ -5388,7 +5398,7 @@
           <a:bodyPr wrap="square" lIns="0" tIns="0" rIns="0" bIns="0" rtlCol="0" anchor="ctr"/>
           <a:lstStyle/>
           <a:p>
-            <a:pPr indent="0" marL="0">
+            <a:pPr marL="0" indent="0">
               <a:buNone/>
             </a:pPr>
             <a:r>
@@ -5422,6 +5432,7 @@
         <a:solidFill>
           <a:srgbClr val="FFFFFF"/>
         </a:solidFill>
+        <a:effectLst/>
       </p:bgPr>
     </p:bg>
     <p:spTree>
@@ -5459,7 +5470,7 @@
           <a:bodyPr wrap="square" lIns="0" tIns="0" rIns="0" bIns="0" rtlCol="0" anchor="ctr"/>
           <a:lstStyle/>
           <a:p>
-            <a:pPr indent="0" marL="0">
+            <a:pPr marL="0" indent="0">
               <a:buNone/>
             </a:pPr>
             <a:r>
@@ -5501,6 +5512,13 @@
             <a:prstDash val="solid"/>
           </a:ln>
         </p:spPr>
+        <p:txBody>
+          <a:bodyPr/>
+          <a:lstStyle/>
+          <a:p>
+            <a:endParaRPr lang="en-DE"/>
+          </a:p>
+        </p:txBody>
       </p:sp>
       <p:sp>
         <p:nvSpPr>
@@ -5523,7 +5541,7 @@
           <a:bodyPr wrap="square" lIns="0" tIns="0" rIns="0" bIns="0" rtlCol="0" anchor="ctr"/>
           <a:lstStyle/>
           <a:p>
-            <a:pPr algn="ctr" indent="0" marL="0">
+            <a:pPr marL="0" indent="0" algn="ctr">
               <a:buNone/>
             </a:pPr>
             <a:r>
@@ -5562,7 +5580,7 @@
           <a:bodyPr wrap="square" lIns="0" tIns="0" rIns="0" bIns="0" rtlCol="0" anchor="ctr"/>
           <a:lstStyle/>
           <a:p>
-            <a:pPr indent="0" marL="0">
+            <a:pPr marL="0" indent="0">
               <a:buNone/>
             </a:pPr>
             <a:r>
@@ -5601,7 +5619,7 @@
           <a:bodyPr wrap="square" lIns="0" tIns="0" rIns="0" bIns="0" rtlCol="0" anchor="ctr"/>
           <a:lstStyle/>
           <a:p>
-            <a:pPr indent="0" marL="0">
+            <a:pPr marL="0" indent="0">
               <a:buNone/>
             </a:pPr>
             <a:r>
@@ -5643,6 +5661,13 @@
             <a:prstDash val="solid"/>
           </a:ln>
         </p:spPr>
+        <p:txBody>
+          <a:bodyPr/>
+          <a:lstStyle/>
+          <a:p>
+            <a:endParaRPr lang="en-DE"/>
+          </a:p>
+        </p:txBody>
       </p:sp>
       <p:sp>
         <p:nvSpPr>
@@ -5665,7 +5690,7 @@
           <a:bodyPr wrap="square" lIns="0" tIns="0" rIns="0" bIns="0" rtlCol="0" anchor="ctr"/>
           <a:lstStyle/>
           <a:p>
-            <a:pPr algn="ctr" indent="0" marL="0">
+            <a:pPr marL="0" indent="0" algn="ctr">
               <a:buNone/>
             </a:pPr>
             <a:r>
@@ -5704,7 +5729,7 @@
           <a:bodyPr wrap="square" lIns="0" tIns="0" rIns="0" bIns="0" rtlCol="0" anchor="ctr"/>
           <a:lstStyle/>
           <a:p>
-            <a:pPr indent="0" marL="0">
+            <a:pPr marL="0" indent="0">
               <a:buNone/>
             </a:pPr>
             <a:r>
@@ -5743,7 +5768,7 @@
           <a:bodyPr wrap="square" lIns="0" tIns="0" rIns="0" bIns="0" rtlCol="0" anchor="ctr"/>
           <a:lstStyle/>
           <a:p>
-            <a:pPr indent="0" marL="0">
+            <a:pPr marL="0" indent="0">
               <a:buNone/>
             </a:pPr>
             <a:r>
@@ -5785,6 +5810,13 @@
             <a:prstDash val="solid"/>
           </a:ln>
         </p:spPr>
+        <p:txBody>
+          <a:bodyPr/>
+          <a:lstStyle/>
+          <a:p>
+            <a:endParaRPr lang="en-DE"/>
+          </a:p>
+        </p:txBody>
       </p:sp>
       <p:sp>
         <p:nvSpPr>
@@ -5807,7 +5839,7 @@
           <a:bodyPr wrap="square" lIns="0" tIns="0" rIns="0" bIns="0" rtlCol="0" anchor="ctr"/>
           <a:lstStyle/>
           <a:p>
-            <a:pPr algn="ctr" indent="0" marL="0">
+            <a:pPr marL="0" indent="0" algn="ctr">
               <a:buNone/>
             </a:pPr>
             <a:r>
@@ -5846,7 +5878,7 @@
           <a:bodyPr wrap="square" lIns="0" tIns="0" rIns="0" bIns="0" rtlCol="0" anchor="ctr"/>
           <a:lstStyle/>
           <a:p>
-            <a:pPr indent="0" marL="0">
+            <a:pPr marL="0" indent="0">
               <a:buNone/>
             </a:pPr>
             <a:r>
@@ -5885,7 +5917,7 @@
           <a:bodyPr wrap="square" lIns="0" tIns="0" rIns="0" bIns="0" rtlCol="0" anchor="ctr"/>
           <a:lstStyle/>
           <a:p>
-            <a:pPr indent="0" marL="0">
+            <a:pPr marL="0" indent="0">
               <a:buNone/>
             </a:pPr>
             <a:r>
@@ -5927,6 +5959,13 @@
             <a:prstDash val="solid"/>
           </a:ln>
         </p:spPr>
+        <p:txBody>
+          <a:bodyPr/>
+          <a:lstStyle/>
+          <a:p>
+            <a:endParaRPr lang="en-DE"/>
+          </a:p>
+        </p:txBody>
       </p:sp>
       <p:sp>
         <p:nvSpPr>
@@ -5949,7 +5988,7 @@
           <a:bodyPr wrap="square" lIns="0" tIns="0" rIns="0" bIns="0" rtlCol="0" anchor="ctr"/>
           <a:lstStyle/>
           <a:p>
-            <a:pPr algn="ctr" indent="0" marL="0">
+            <a:pPr marL="0" indent="0" algn="ctr">
               <a:buNone/>
             </a:pPr>
             <a:r>
@@ -5988,7 +6027,7 @@
           <a:bodyPr wrap="square" lIns="0" tIns="0" rIns="0" bIns="0" rtlCol="0" anchor="ctr"/>
           <a:lstStyle/>
           <a:p>
-            <a:pPr indent="0" marL="0">
+            <a:pPr marL="0" indent="0">
               <a:buNone/>
             </a:pPr>
             <a:r>
@@ -6027,7 +6066,7 @@
           <a:bodyPr wrap="square" lIns="0" tIns="0" rIns="0" bIns="0" rtlCol="0" anchor="ctr"/>
           <a:lstStyle/>
           <a:p>
-            <a:pPr indent="0" marL="0">
+            <a:pPr marL="0" indent="0">
               <a:buNone/>
             </a:pPr>
             <a:r>
@@ -6071,17 +6110,24 @@
             <a:prstDash val="solid"/>
           </a:ln>
         </p:spPr>
+        <p:txBody>
+          <a:bodyPr/>
+          <a:lstStyle/>
+          <a:p>
+            <a:endParaRPr lang="en-DE"/>
+          </a:p>
+        </p:txBody>
       </p:sp>
       <p:pic>
         <p:nvPicPr>
-          <p:cNvPr id="20" name="Image 0" descr="preencoded.png">    </p:cNvPr>
+          <p:cNvPr id="20" name="Image 0" descr="preencoded.png"/>
           <p:cNvPicPr>
             <a:picLocks noChangeAspect="1"/>
           </p:cNvPicPr>
           <p:nvPr/>
         </p:nvPicPr>
         <p:blipFill>
-          <a:blip r:embed="rId1"/>
+          <a:blip r:embed="rId3"/>
           <a:stretch>
             <a:fillRect/>
           </a:stretch>
@@ -6117,7 +6163,7 @@
           <a:bodyPr wrap="square" lIns="0" tIns="0" rIns="0" bIns="0" rtlCol="0" anchor="ctr"/>
           <a:lstStyle/>
           <a:p>
-            <a:pPr algn="ctr" indent="0" marL="0">
+            <a:pPr marL="0" indent="0" algn="ctr">
               <a:buNone/>
             </a:pPr>
             <a:r>
@@ -6156,7 +6202,7 @@
           <a:bodyPr wrap="square" lIns="0" tIns="0" rIns="0" bIns="0" rtlCol="0" anchor="ctr"/>
           <a:lstStyle/>
           <a:p>
-            <a:pPr algn="ctr" indent="0" marL="0">
+            <a:pPr marL="0" indent="0" algn="ctr">
               <a:buNone/>
             </a:pPr>
             <a:r>
@@ -6195,7 +6241,7 @@
           <a:bodyPr wrap="square" lIns="0" tIns="0" rIns="0" bIns="0" rtlCol="0" anchor="ctr"/>
           <a:lstStyle/>
           <a:p>
-            <a:pPr algn="ctr" indent="0" marL="0">
+            <a:pPr marL="0" indent="0" algn="ctr">
               <a:buNone/>
             </a:pPr>
             <a:r>
@@ -6234,7 +6280,7 @@
           <a:bodyPr wrap="square" lIns="0" tIns="0" rIns="0" bIns="0" rtlCol="0" anchor="ctr"/>
           <a:lstStyle/>
           <a:p>
-            <a:pPr algn="ctr" indent="0" marL="0">
+            <a:pPr marL="0" indent="0" algn="ctr">
               <a:buNone/>
             </a:pPr>
             <a:r>
@@ -6268,6 +6314,7 @@
         <a:solidFill>
           <a:srgbClr val="021B2E"/>
         </a:solidFill>
+        <a:effectLst/>
       </p:bgPr>
     </p:bg>
     <p:spTree>
@@ -6305,7 +6352,7 @@
           <a:bodyPr wrap="square" lIns="0" tIns="0" rIns="0" bIns="0" rtlCol="0" anchor="ctr"/>
           <a:lstStyle/>
           <a:p>
-            <a:pPr indent="0" marL="0">
+            <a:pPr marL="0" indent="0">
               <a:buNone/>
             </a:pPr>
             <a:r>
@@ -6344,7 +6391,7 @@
           <a:bodyPr wrap="square" lIns="0" tIns="0" rIns="0" bIns="0" rtlCol="0" anchor="ctr"/>
           <a:lstStyle/>
           <a:p>
-            <a:pPr indent="0" marL="0">
+            <a:pPr marL="0" indent="0">
               <a:buNone/>
             </a:pPr>
             <a:r>
@@ -6388,6 +6435,13 @@
             <a:prstDash val="solid"/>
           </a:ln>
         </p:spPr>
+        <p:txBody>
+          <a:bodyPr/>
+          <a:lstStyle/>
+          <a:p>
+            <a:endParaRPr lang="en-DE"/>
+          </a:p>
+        </p:txBody>
       </p:sp>
       <p:sp>
         <p:nvSpPr>
@@ -6410,7 +6464,7 @@
           <a:bodyPr wrap="square" lIns="0" tIns="0" rIns="0" bIns="0" rtlCol="0" anchor="ctr"/>
           <a:lstStyle/>
           <a:p>
-            <a:pPr indent="0" marL="0">
+            <a:pPr marL="0" indent="0">
               <a:buNone/>
             </a:pPr>
             <a:r>
@@ -6449,7 +6503,7 @@
           <a:bodyPr wrap="square" lIns="0" tIns="0" rIns="0" bIns="0" rtlCol="0" anchor="ctr"/>
           <a:lstStyle/>
           <a:p>
-            <a:pPr indent="0" marL="0">
+            <a:pPr marL="0" indent="0">
               <a:buNone/>
             </a:pPr>
             <a:r>
@@ -6489,6 +6543,13 @@
             <a:prstDash val="solid"/>
           </a:ln>
         </p:spPr>
+        <p:txBody>
+          <a:bodyPr/>
+          <a:lstStyle/>
+          <a:p>
+            <a:endParaRPr lang="en-DE"/>
+          </a:p>
+        </p:txBody>
       </p:sp>
       <p:sp>
         <p:nvSpPr>
@@ -6516,6 +6577,13 @@
             <a:prstDash val="solid"/>
           </a:ln>
         </p:spPr>
+        <p:txBody>
+          <a:bodyPr/>
+          <a:lstStyle/>
+          <a:p>
+            <a:endParaRPr lang="en-DE"/>
+          </a:p>
+        </p:txBody>
       </p:sp>
       <p:sp>
         <p:nvSpPr>
@@ -6538,7 +6606,7 @@
           <a:bodyPr wrap="square" lIns="0" tIns="0" rIns="0" bIns="0" rtlCol="0" anchor="ctr"/>
           <a:lstStyle/>
           <a:p>
-            <a:pPr indent="0" marL="0">
+            <a:pPr marL="0" indent="0">
               <a:buNone/>
             </a:pPr>
             <a:r>
@@ -6577,7 +6645,7 @@
           <a:bodyPr wrap="square" lIns="0" tIns="0" rIns="0" bIns="0" rtlCol="0" anchor="ctr"/>
           <a:lstStyle/>
           <a:p>
-            <a:pPr indent="0" marL="0">
+            <a:pPr marL="0" indent="0">
               <a:buNone/>
             </a:pPr>
             <a:r>
@@ -6617,6 +6685,13 @@
             <a:prstDash val="solid"/>
           </a:ln>
         </p:spPr>
+        <p:txBody>
+          <a:bodyPr/>
+          <a:lstStyle/>
+          <a:p>
+            <a:endParaRPr lang="en-DE"/>
+          </a:p>
+        </p:txBody>
       </p:sp>
       <p:sp>
         <p:nvSpPr>
@@ -6644,6 +6719,13 @@
             <a:prstDash val="solid"/>
           </a:ln>
         </p:spPr>
+        <p:txBody>
+          <a:bodyPr/>
+          <a:lstStyle/>
+          <a:p>
+            <a:endParaRPr lang="en-DE"/>
+          </a:p>
+        </p:txBody>
       </p:sp>
       <p:sp>
         <p:nvSpPr>
@@ -6666,7 +6748,7 @@
           <a:bodyPr wrap="square" lIns="0" tIns="0" rIns="0" bIns="0" rtlCol="0" anchor="ctr"/>
           <a:lstStyle/>
           <a:p>
-            <a:pPr indent="0" marL="0">
+            <a:pPr marL="0" indent="0">
               <a:buNone/>
             </a:pPr>
             <a:r>
@@ -6705,7 +6787,7 @@
           <a:bodyPr wrap="square" lIns="0" tIns="0" rIns="0" bIns="0" rtlCol="0" anchor="ctr"/>
           <a:lstStyle/>
           <a:p>
-            <a:pPr indent="0" marL="0">
+            <a:pPr marL="0" indent="0">
               <a:buNone/>
             </a:pPr>
             <a:r>
@@ -6745,6 +6827,13 @@
             <a:prstDash val="solid"/>
           </a:ln>
         </p:spPr>
+        <p:txBody>
+          <a:bodyPr/>
+          <a:lstStyle/>
+          <a:p>
+            <a:endParaRPr lang="en-DE"/>
+          </a:p>
+        </p:txBody>
       </p:sp>
       <p:sp>
         <p:nvSpPr>
@@ -6772,6 +6861,13 @@
             <a:prstDash val="solid"/>
           </a:ln>
         </p:spPr>
+        <p:txBody>
+          <a:bodyPr/>
+          <a:lstStyle/>
+          <a:p>
+            <a:endParaRPr lang="en-DE"/>
+          </a:p>
+        </p:txBody>
       </p:sp>
       <p:sp>
         <p:nvSpPr>
@@ -6794,7 +6890,7 @@
           <a:bodyPr wrap="square" lIns="0" tIns="0" rIns="0" bIns="0" rtlCol="0" anchor="ctr"/>
           <a:lstStyle/>
           <a:p>
-            <a:pPr indent="0" marL="0">
+            <a:pPr marL="0" indent="0">
               <a:buNone/>
             </a:pPr>
             <a:r>
@@ -6833,7 +6929,7 @@
           <a:bodyPr wrap="square" lIns="0" tIns="0" rIns="0" bIns="0" rtlCol="0" anchor="ctr"/>
           <a:lstStyle/>
           <a:p>
-            <a:pPr indent="0" marL="0">
+            <a:pPr marL="0" indent="0">
               <a:buNone/>
             </a:pPr>
             <a:r>
@@ -6867,6 +6963,7 @@
         <a:solidFill>
           <a:srgbClr val="F0F7FC"/>
         </a:solidFill>
+        <a:effectLst/>
       </p:bgPr>
     </p:bg>
     <p:spTree>
@@ -6904,7 +7001,7 @@
           <a:bodyPr wrap="square" lIns="0" tIns="0" rIns="0" bIns="0" rtlCol="0" anchor="ctr"/>
           <a:lstStyle/>
           <a:p>
-            <a:pPr indent="0" marL="0">
+            <a:pPr marL="0" indent="0">
               <a:buNone/>
             </a:pPr>
             <a:r>
@@ -6943,13 +7040,20 @@
           </a:solidFill>
           <a:ln/>
           <a:effectLst>
-            <a:outerShdw sx="100000" sy="100000" kx="0" ky="0" algn="bl" rotWithShape="0" blurRad="127000" dist="38100" dir="2700000">
+            <a:outerShdw blurRad="127000" dist="38100" dir="2700000" algn="bl" rotWithShape="0">
               <a:srgbClr val="000000">
                 <a:alpha val="9000"/>
               </a:srgbClr>
             </a:outerShdw>
           </a:effectLst>
         </p:spPr>
+        <p:txBody>
+          <a:bodyPr/>
+          <a:lstStyle/>
+          <a:p>
+            <a:endParaRPr lang="en-DE"/>
+          </a:p>
+        </p:txBody>
       </p:sp>
       <p:sp>
         <p:nvSpPr>
@@ -6975,17 +7079,24 @@
             <a:prstDash val="solid"/>
           </a:ln>
         </p:spPr>
+        <p:txBody>
+          <a:bodyPr/>
+          <a:lstStyle/>
+          <a:p>
+            <a:endParaRPr lang="en-DE"/>
+          </a:p>
+        </p:txBody>
       </p:sp>
       <p:pic>
         <p:nvPicPr>
-          <p:cNvPr id="5" name="Image 0" descr="preencoded.png">    </p:cNvPr>
+          <p:cNvPr id="5" name="Image 0" descr="preencoded.png"/>
           <p:cNvPicPr>
             <a:picLocks noChangeAspect="1"/>
           </p:cNvPicPr>
           <p:nvPr/>
         </p:nvPicPr>
         <p:blipFill>
-          <a:blip r:embed="rId1"/>
+          <a:blip r:embed="rId3"/>
           <a:stretch>
             <a:fillRect/>
           </a:stretch>
@@ -7021,7 +7132,7 @@
           <a:bodyPr wrap="square" lIns="0" tIns="0" rIns="0" bIns="0" rtlCol="0" anchor="ctr"/>
           <a:lstStyle/>
           <a:p>
-            <a:pPr indent="0" marL="0">
+            <a:pPr marL="0" indent="0">
               <a:buNone/>
             </a:pPr>
             <a:r>
@@ -7060,7 +7171,7 @@
           <a:bodyPr wrap="square" lIns="0" tIns="0" rIns="0" bIns="0" rtlCol="0" anchor="ctr"/>
           <a:lstStyle/>
           <a:p>
-            <a:pPr indent="0" marL="0">
+            <a:pPr marL="0" indent="0">
               <a:buNone/>
             </a:pPr>
             <a:r>
@@ -7099,13 +7210,20 @@
           </a:solidFill>
           <a:ln/>
           <a:effectLst>
-            <a:outerShdw sx="100000" sy="100000" kx="0" ky="0" algn="bl" rotWithShape="0" blurRad="127000" dist="38100" dir="2700000">
+            <a:outerShdw blurRad="127000" dist="38100" dir="2700000" algn="bl" rotWithShape="0">
               <a:srgbClr val="000000">
                 <a:alpha val="9000"/>
               </a:srgbClr>
             </a:outerShdw>
           </a:effectLst>
         </p:spPr>
+        <p:txBody>
+          <a:bodyPr/>
+          <a:lstStyle/>
+          <a:p>
+            <a:endParaRPr lang="en-DE"/>
+          </a:p>
+        </p:txBody>
       </p:sp>
       <p:sp>
         <p:nvSpPr>
@@ -7131,17 +7249,24 @@
             <a:prstDash val="solid"/>
           </a:ln>
         </p:spPr>
+        <p:txBody>
+          <a:bodyPr/>
+          <a:lstStyle/>
+          <a:p>
+            <a:endParaRPr lang="en-DE"/>
+          </a:p>
+        </p:txBody>
       </p:sp>
       <p:pic>
         <p:nvPicPr>
-          <p:cNvPr id="10" name="Image 1" descr="preencoded.png">    </p:cNvPr>
+          <p:cNvPr id="10" name="Image 1" descr="preencoded.png"/>
           <p:cNvPicPr>
             <a:picLocks noChangeAspect="1"/>
           </p:cNvPicPr>
           <p:nvPr/>
         </p:nvPicPr>
         <p:blipFill>
-          <a:blip r:embed="rId2"/>
+          <a:blip r:embed="rId4"/>
           <a:stretch>
             <a:fillRect/>
           </a:stretch>
@@ -7177,7 +7302,7 @@
           <a:bodyPr wrap="square" lIns="0" tIns="0" rIns="0" bIns="0" rtlCol="0" anchor="ctr"/>
           <a:lstStyle/>
           <a:p>
-            <a:pPr indent="0" marL="0">
+            <a:pPr marL="0" indent="0">
               <a:buNone/>
             </a:pPr>
             <a:r>
@@ -7216,7 +7341,7 @@
           <a:bodyPr wrap="square" lIns="0" tIns="0" rIns="0" bIns="0" rtlCol="0" anchor="ctr"/>
           <a:lstStyle/>
           <a:p>
-            <a:pPr indent="0" marL="0">
+            <a:pPr marL="0" indent="0">
               <a:buNone/>
             </a:pPr>
             <a:r>
@@ -7255,13 +7380,20 @@
           </a:solidFill>
           <a:ln/>
           <a:effectLst>
-            <a:outerShdw sx="100000" sy="100000" kx="0" ky="0" algn="bl" rotWithShape="0" blurRad="127000" dist="38100" dir="2700000">
+            <a:outerShdw blurRad="127000" dist="38100" dir="2700000" algn="bl" rotWithShape="0">
               <a:srgbClr val="000000">
                 <a:alpha val="9000"/>
               </a:srgbClr>
             </a:outerShdw>
           </a:effectLst>
         </p:spPr>
+        <p:txBody>
+          <a:bodyPr/>
+          <a:lstStyle/>
+          <a:p>
+            <a:endParaRPr lang="en-DE"/>
+          </a:p>
+        </p:txBody>
       </p:sp>
       <p:sp>
         <p:nvSpPr>
@@ -7287,17 +7419,24 @@
             <a:prstDash val="solid"/>
           </a:ln>
         </p:spPr>
+        <p:txBody>
+          <a:bodyPr/>
+          <a:lstStyle/>
+          <a:p>
+            <a:endParaRPr lang="en-DE"/>
+          </a:p>
+        </p:txBody>
       </p:sp>
       <p:pic>
         <p:nvPicPr>
-          <p:cNvPr id="15" name="Image 2" descr="preencoded.png">    </p:cNvPr>
+          <p:cNvPr id="15" name="Image 2" descr="preencoded.png"/>
           <p:cNvPicPr>
             <a:picLocks noChangeAspect="1"/>
           </p:cNvPicPr>
           <p:nvPr/>
         </p:nvPicPr>
         <p:blipFill>
-          <a:blip r:embed="rId3"/>
+          <a:blip r:embed="rId5"/>
           <a:stretch>
             <a:fillRect/>
           </a:stretch>
@@ -7333,7 +7472,7 @@
           <a:bodyPr wrap="square" lIns="0" tIns="0" rIns="0" bIns="0" rtlCol="0" anchor="ctr"/>
           <a:lstStyle/>
           <a:p>
-            <a:pPr indent="0" marL="0">
+            <a:pPr marL="0" indent="0">
               <a:buNone/>
             </a:pPr>
             <a:r>
@@ -7372,7 +7511,7 @@
           <a:bodyPr wrap="square" lIns="0" tIns="0" rIns="0" bIns="0" rtlCol="0" anchor="ctr"/>
           <a:lstStyle/>
           <a:p>
-            <a:pPr indent="0" marL="0">
+            <a:pPr marL="0" indent="0">
               <a:buNone/>
             </a:pPr>
             <a:r>
@@ -7411,13 +7550,20 @@
           </a:solidFill>
           <a:ln/>
           <a:effectLst>
-            <a:outerShdw sx="100000" sy="100000" kx="0" ky="0" algn="bl" rotWithShape="0" blurRad="127000" dist="38100" dir="2700000">
+            <a:outerShdw blurRad="127000" dist="38100" dir="2700000" algn="bl" rotWithShape="0">
               <a:srgbClr val="000000">
                 <a:alpha val="9000"/>
               </a:srgbClr>
             </a:outerShdw>
           </a:effectLst>
         </p:spPr>
+        <p:txBody>
+          <a:bodyPr/>
+          <a:lstStyle/>
+          <a:p>
+            <a:endParaRPr lang="en-DE"/>
+          </a:p>
+        </p:txBody>
       </p:sp>
       <p:sp>
         <p:nvSpPr>
@@ -7443,17 +7589,24 @@
             <a:prstDash val="solid"/>
           </a:ln>
         </p:spPr>
+        <p:txBody>
+          <a:bodyPr/>
+          <a:lstStyle/>
+          <a:p>
+            <a:endParaRPr lang="en-DE"/>
+          </a:p>
+        </p:txBody>
       </p:sp>
       <p:pic>
         <p:nvPicPr>
-          <p:cNvPr id="20" name="Image 3" descr="preencoded.png">    </p:cNvPr>
+          <p:cNvPr id="20" name="Image 3" descr="preencoded.png"/>
           <p:cNvPicPr>
             <a:picLocks noChangeAspect="1"/>
           </p:cNvPicPr>
           <p:nvPr/>
         </p:nvPicPr>
         <p:blipFill>
-          <a:blip r:embed="rId4"/>
+          <a:blip r:embed="rId6"/>
           <a:stretch>
             <a:fillRect/>
           </a:stretch>
@@ -7489,7 +7642,7 @@
           <a:bodyPr wrap="square" lIns="0" tIns="0" rIns="0" bIns="0" rtlCol="0" anchor="ctr"/>
           <a:lstStyle/>
           <a:p>
-            <a:pPr indent="0" marL="0">
+            <a:pPr marL="0" indent="0">
               <a:buNone/>
             </a:pPr>
             <a:r>
@@ -7528,7 +7681,7 @@
           <a:bodyPr wrap="square" lIns="0" tIns="0" rIns="0" bIns="0" rtlCol="0" anchor="ctr"/>
           <a:lstStyle/>
           <a:p>
-            <a:pPr indent="0" marL="0">
+            <a:pPr marL="0" indent="0">
               <a:buNone/>
             </a:pPr>
             <a:r>
@@ -7562,6 +7715,7 @@
         <a:solidFill>
           <a:srgbClr val="FFFFFF"/>
         </a:solidFill>
+        <a:effectLst/>
       </p:bgPr>
     </p:bg>
     <p:spTree>
@@ -7599,7 +7753,7 @@
           <a:bodyPr wrap="square" lIns="0" tIns="0" rIns="0" bIns="0" rtlCol="0" anchor="ctr"/>
           <a:lstStyle/>
           <a:p>
-            <a:pPr indent="0" marL="0">
+            <a:pPr marL="0" indent="0">
               <a:buNone/>
             </a:pPr>
             <a:r>
@@ -7643,6 +7797,13 @@
             <a:prstDash val="solid"/>
           </a:ln>
         </p:spPr>
+        <p:txBody>
+          <a:bodyPr/>
+          <a:lstStyle/>
+          <a:p>
+            <a:endParaRPr lang="en-DE"/>
+          </a:p>
+        </p:txBody>
       </p:sp>
       <p:sp>
         <p:nvSpPr>
@@ -7665,7 +7826,7 @@
           <a:bodyPr wrap="square" lIns="0" tIns="0" rIns="0" bIns="0" rtlCol="0" anchor="ctr"/>
           <a:lstStyle/>
           <a:p>
-            <a:pPr algn="ctr" indent="0" marL="0">
+            <a:pPr marL="0" indent="0" algn="ctr">
               <a:buNone/>
             </a:pPr>
             <a:r>
@@ -7709,6 +7870,13 @@
             <a:prstDash val="solid"/>
           </a:ln>
         </p:spPr>
+        <p:txBody>
+          <a:bodyPr/>
+          <a:lstStyle/>
+          <a:p>
+            <a:endParaRPr lang="en-DE"/>
+          </a:p>
+        </p:txBody>
       </p:sp>
       <p:sp>
         <p:nvSpPr>
@@ -7731,7 +7899,7 @@
           <a:bodyPr wrap="square" lIns="0" tIns="0" rIns="0" bIns="0" rtlCol="0" anchor="ctr"/>
           <a:lstStyle/>
           <a:p>
-            <a:pPr algn="ctr" indent="0" marL="0">
+            <a:pPr marL="0" indent="0" algn="ctr">
               <a:buNone/>
             </a:pPr>
             <a:r>
@@ -7773,6 +7941,13 @@
             <a:prstDash val="solid"/>
           </a:ln>
         </p:spPr>
+        <p:txBody>
+          <a:bodyPr/>
+          <a:lstStyle/>
+          <a:p>
+            <a:endParaRPr lang="en-DE"/>
+          </a:p>
+        </p:txBody>
       </p:sp>
       <p:sp>
         <p:nvSpPr>
@@ -7795,7 +7970,7 @@
           <a:bodyPr wrap="square" lIns="0" tIns="0" rIns="0" bIns="0" rtlCol="0" anchor="ctr"/>
           <a:lstStyle/>
           <a:p>
-            <a:pPr indent="0" marL="0">
+            <a:pPr marL="0" indent="0">
               <a:buNone/>
             </a:pPr>
             <a:r>
@@ -7834,7 +8009,7 @@
           <a:bodyPr wrap="square" lIns="0" tIns="0" rIns="0" bIns="0" rtlCol="0" anchor="ctr"/>
           <a:lstStyle/>
           <a:p>
-            <a:pPr algn="ctr" indent="0" marL="0">
+            <a:pPr marL="0" indent="0" algn="ctr">
               <a:buNone/>
             </a:pPr>
             <a:r>
@@ -7873,7 +8048,7 @@
           <a:bodyPr wrap="square" lIns="0" tIns="0" rIns="0" bIns="0" rtlCol="0" anchor="ctr"/>
           <a:lstStyle/>
           <a:p>
-            <a:pPr algn="ctr" indent="0" marL="0">
+            <a:pPr marL="0" indent="0" algn="ctr">
               <a:buNone/>
             </a:pPr>
             <a:r>
@@ -7915,6 +8090,13 @@
             <a:prstDash val="solid"/>
           </a:ln>
         </p:spPr>
+        <p:txBody>
+          <a:bodyPr/>
+          <a:lstStyle/>
+          <a:p>
+            <a:endParaRPr lang="en-DE"/>
+          </a:p>
+        </p:txBody>
       </p:sp>
       <p:sp>
         <p:nvSpPr>
@@ -7937,7 +8119,7 @@
           <a:bodyPr wrap="square" lIns="0" tIns="0" rIns="0" bIns="0" rtlCol="0" anchor="ctr"/>
           <a:lstStyle/>
           <a:p>
-            <a:pPr indent="0" marL="0">
+            <a:pPr marL="0" indent="0">
               <a:buNone/>
             </a:pPr>
             <a:r>
@@ -7976,7 +8158,7 @@
           <a:bodyPr wrap="square" lIns="0" tIns="0" rIns="0" bIns="0" rtlCol="0" anchor="ctr"/>
           <a:lstStyle/>
           <a:p>
-            <a:pPr algn="ctr" indent="0" marL="0">
+            <a:pPr marL="0" indent="0" algn="ctr">
               <a:buNone/>
             </a:pPr>
             <a:r>
@@ -8015,7 +8197,7 @@
           <a:bodyPr wrap="square" lIns="0" tIns="0" rIns="0" bIns="0" rtlCol="0" anchor="ctr"/>
           <a:lstStyle/>
           <a:p>
-            <a:pPr algn="ctr" indent="0" marL="0">
+            <a:pPr marL="0" indent="0" algn="ctr">
               <a:buNone/>
             </a:pPr>
             <a:r>
@@ -8057,6 +8239,13 @@
             <a:prstDash val="solid"/>
           </a:ln>
         </p:spPr>
+        <p:txBody>
+          <a:bodyPr/>
+          <a:lstStyle/>
+          <a:p>
+            <a:endParaRPr lang="en-DE"/>
+          </a:p>
+        </p:txBody>
       </p:sp>
       <p:sp>
         <p:nvSpPr>
@@ -8079,7 +8268,7 @@
           <a:bodyPr wrap="square" lIns="0" tIns="0" rIns="0" bIns="0" rtlCol="0" anchor="ctr"/>
           <a:lstStyle/>
           <a:p>
-            <a:pPr indent="0" marL="0">
+            <a:pPr marL="0" indent="0">
               <a:buNone/>
             </a:pPr>
             <a:r>
@@ -8118,7 +8307,7 @@
           <a:bodyPr wrap="square" lIns="0" tIns="0" rIns="0" bIns="0" rtlCol="0" anchor="ctr"/>
           <a:lstStyle/>
           <a:p>
-            <a:pPr algn="ctr" indent="0" marL="0">
+            <a:pPr marL="0" indent="0" algn="ctr">
               <a:buNone/>
             </a:pPr>
             <a:r>
@@ -8157,7 +8346,7 @@
           <a:bodyPr wrap="square" lIns="0" tIns="0" rIns="0" bIns="0" rtlCol="0" anchor="ctr"/>
           <a:lstStyle/>
           <a:p>
-            <a:pPr algn="ctr" indent="0" marL="0">
+            <a:pPr marL="0" indent="0" algn="ctr">
               <a:buNone/>
             </a:pPr>
             <a:r>
@@ -8199,6 +8388,13 @@
             <a:prstDash val="solid"/>
           </a:ln>
         </p:spPr>
+        <p:txBody>
+          <a:bodyPr/>
+          <a:lstStyle/>
+          <a:p>
+            <a:endParaRPr lang="en-DE"/>
+          </a:p>
+        </p:txBody>
       </p:sp>
       <p:sp>
         <p:nvSpPr>
@@ -8221,7 +8417,7 @@
           <a:bodyPr wrap="square" lIns="0" tIns="0" rIns="0" bIns="0" rtlCol="0" anchor="ctr"/>
           <a:lstStyle/>
           <a:p>
-            <a:pPr indent="0" marL="0">
+            <a:pPr marL="0" indent="0">
               <a:buNone/>
             </a:pPr>
             <a:r>
@@ -8260,7 +8456,7 @@
           <a:bodyPr wrap="square" lIns="0" tIns="0" rIns="0" bIns="0" rtlCol="0" anchor="ctr"/>
           <a:lstStyle/>
           <a:p>
-            <a:pPr algn="ctr" indent="0" marL="0">
+            <a:pPr marL="0" indent="0" algn="ctr">
               <a:buNone/>
             </a:pPr>
             <a:r>
@@ -8299,7 +8495,7 @@
           <a:bodyPr wrap="square" lIns="0" tIns="0" rIns="0" bIns="0" rtlCol="0" anchor="ctr"/>
           <a:lstStyle/>
           <a:p>
-            <a:pPr algn="ctr" indent="0" marL="0">
+            <a:pPr marL="0" indent="0" algn="ctr">
               <a:buNone/>
             </a:pPr>
             <a:r>
@@ -8341,6 +8537,13 @@
             <a:prstDash val="solid"/>
           </a:ln>
         </p:spPr>
+        <p:txBody>
+          <a:bodyPr/>
+          <a:lstStyle/>
+          <a:p>
+            <a:endParaRPr lang="en-DE"/>
+          </a:p>
+        </p:txBody>
       </p:sp>
       <p:sp>
         <p:nvSpPr>
@@ -8363,7 +8566,7 @@
           <a:bodyPr wrap="square" lIns="0" tIns="0" rIns="0" bIns="0" rtlCol="0" anchor="ctr"/>
           <a:lstStyle/>
           <a:p>
-            <a:pPr indent="0" marL="0">
+            <a:pPr marL="0" indent="0">
               <a:buNone/>
             </a:pPr>
             <a:r>
@@ -8402,7 +8605,7 @@
           <a:bodyPr wrap="square" lIns="0" tIns="0" rIns="0" bIns="0" rtlCol="0" anchor="ctr"/>
           <a:lstStyle/>
           <a:p>
-            <a:pPr algn="ctr" indent="0" marL="0">
+            <a:pPr marL="0" indent="0" algn="ctr">
               <a:buNone/>
             </a:pPr>
             <a:r>
@@ -8441,7 +8644,7 @@
           <a:bodyPr wrap="square" lIns="0" tIns="0" rIns="0" bIns="0" rtlCol="0" anchor="ctr"/>
           <a:lstStyle/>
           <a:p>
-            <a:pPr algn="ctr" indent="0" marL="0">
+            <a:pPr marL="0" indent="0" algn="ctr">
               <a:buNone/>
             </a:pPr>
             <a:r>
@@ -8483,6 +8686,13 @@
             <a:prstDash val="solid"/>
           </a:ln>
         </p:spPr>
+        <p:txBody>
+          <a:bodyPr/>
+          <a:lstStyle/>
+          <a:p>
+            <a:endParaRPr lang="en-DE"/>
+          </a:p>
+        </p:txBody>
       </p:sp>
       <p:sp>
         <p:nvSpPr>
@@ -8505,7 +8715,7 @@
           <a:bodyPr wrap="square" lIns="0" tIns="0" rIns="0" bIns="0" rtlCol="0" anchor="ctr"/>
           <a:lstStyle/>
           <a:p>
-            <a:pPr indent="0" marL="0">
+            <a:pPr marL="0" indent="0">
               <a:buNone/>
             </a:pPr>
             <a:r>
@@ -8544,7 +8754,7 @@
           <a:bodyPr wrap="square" lIns="0" tIns="0" rIns="0" bIns="0" rtlCol="0" anchor="ctr"/>
           <a:lstStyle/>
           <a:p>
-            <a:pPr algn="ctr" indent="0" marL="0">
+            <a:pPr marL="0" indent="0" algn="ctr">
               <a:buNone/>
             </a:pPr>
             <a:r>
@@ -8583,7 +8793,7 @@
           <a:bodyPr wrap="square" lIns="0" tIns="0" rIns="0" bIns="0" rtlCol="0" anchor="ctr"/>
           <a:lstStyle/>
           <a:p>
-            <a:pPr algn="ctr" indent="0" marL="0">
+            <a:pPr marL="0" indent="0" algn="ctr">
               <a:buNone/>
             </a:pPr>
             <a:r>
@@ -8617,6 +8827,7 @@
         <a:solidFill>
           <a:srgbClr val="021B2E"/>
         </a:solidFill>
+        <a:effectLst/>
       </p:bgPr>
     </p:bg>
     <p:spTree>
@@ -8654,7 +8865,7 @@
           <a:bodyPr wrap="square" lIns="0" tIns="0" rIns="0" bIns="0" rtlCol="0" anchor="ctr"/>
           <a:lstStyle/>
           <a:p>
-            <a:pPr indent="0" marL="0">
+            <a:pPr marL="0" indent="0">
               <a:buNone/>
             </a:pPr>
             <a:r>
@@ -8698,17 +8909,24 @@
             <a:prstDash val="solid"/>
           </a:ln>
         </p:spPr>
+        <p:txBody>
+          <a:bodyPr/>
+          <a:lstStyle/>
+          <a:p>
+            <a:endParaRPr lang="en-DE"/>
+          </a:p>
+        </p:txBody>
       </p:sp>
       <p:pic>
         <p:nvPicPr>
-          <p:cNvPr id="4" name="Image 0" descr="preencoded.png">    </p:cNvPr>
+          <p:cNvPr id="4" name="Image 0" descr="preencoded.png"/>
           <p:cNvPicPr>
             <a:picLocks noChangeAspect="1"/>
           </p:cNvPicPr>
           <p:nvPr/>
         </p:nvPicPr>
         <p:blipFill>
-          <a:blip r:embed="rId1"/>
+          <a:blip r:embed="rId3"/>
           <a:stretch>
             <a:fillRect/>
           </a:stretch>
@@ -8744,7 +8962,7 @@
           <a:bodyPr wrap="square" lIns="0" tIns="0" rIns="0" bIns="0" rtlCol="0" anchor="ctr"/>
           <a:lstStyle/>
           <a:p>
-            <a:pPr algn="ctr" indent="0" marL="0">
+            <a:pPr marL="0" indent="0" algn="ctr">
               <a:buNone/>
             </a:pPr>
             <a:r>
@@ -8783,7 +9001,7 @@
           <a:bodyPr wrap="square" lIns="0" tIns="0" rIns="0" bIns="0" rtlCol="0" anchor="ctr"/>
           <a:lstStyle/>
           <a:p>
-            <a:pPr algn="ctr" indent="0" marL="0">
+            <a:pPr marL="0" indent="0" algn="ctr">
               <a:buNone/>
             </a:pPr>
             <a:r>
@@ -8827,17 +9045,24 @@
             <a:prstDash val="solid"/>
           </a:ln>
         </p:spPr>
+        <p:txBody>
+          <a:bodyPr/>
+          <a:lstStyle/>
+          <a:p>
+            <a:endParaRPr lang="en-DE"/>
+          </a:p>
+        </p:txBody>
       </p:sp>
       <p:pic>
         <p:nvPicPr>
-          <p:cNvPr id="8" name="Image 1" descr="preencoded.png">    </p:cNvPr>
+          <p:cNvPr id="8" name="Image 1" descr="preencoded.png"/>
           <p:cNvPicPr>
             <a:picLocks noChangeAspect="1"/>
           </p:cNvPicPr>
           <p:nvPr/>
         </p:nvPicPr>
         <p:blipFill>
-          <a:blip r:embed="rId2"/>
+          <a:blip r:embed="rId4"/>
           <a:stretch>
             <a:fillRect/>
           </a:stretch>
@@ -8873,7 +9098,7 @@
           <a:bodyPr wrap="square" lIns="0" tIns="0" rIns="0" bIns="0" rtlCol="0" anchor="ctr"/>
           <a:lstStyle/>
           <a:p>
-            <a:pPr algn="ctr" indent="0" marL="0">
+            <a:pPr marL="0" indent="0" algn="ctr">
               <a:buNone/>
             </a:pPr>
             <a:r>
@@ -8912,7 +9137,7 @@
           <a:bodyPr wrap="square" lIns="0" tIns="0" rIns="0" bIns="0" rtlCol="0" anchor="ctr"/>
           <a:lstStyle/>
           <a:p>
-            <a:pPr algn="ctr" indent="0" marL="0">
+            <a:pPr marL="0" indent="0" algn="ctr">
               <a:buNone/>
             </a:pPr>
             <a:r>
@@ -8956,17 +9181,24 @@
             <a:prstDash val="solid"/>
           </a:ln>
         </p:spPr>
+        <p:txBody>
+          <a:bodyPr/>
+          <a:lstStyle/>
+          <a:p>
+            <a:endParaRPr lang="en-DE"/>
+          </a:p>
+        </p:txBody>
       </p:sp>
       <p:pic>
         <p:nvPicPr>
-          <p:cNvPr id="12" name="Image 2" descr="preencoded.png">    </p:cNvPr>
+          <p:cNvPr id="12" name="Image 2" descr="preencoded.png"/>
           <p:cNvPicPr>
             <a:picLocks noChangeAspect="1"/>
           </p:cNvPicPr>
           <p:nvPr/>
         </p:nvPicPr>
         <p:blipFill>
-          <a:blip r:embed="rId3"/>
+          <a:blip r:embed="rId5"/>
           <a:stretch>
             <a:fillRect/>
           </a:stretch>
@@ -9002,7 +9234,7 @@
           <a:bodyPr wrap="square" lIns="0" tIns="0" rIns="0" bIns="0" rtlCol="0" anchor="ctr"/>
           <a:lstStyle/>
           <a:p>
-            <a:pPr algn="ctr" indent="0" marL="0">
+            <a:pPr marL="0" indent="0" algn="ctr">
               <a:buNone/>
             </a:pPr>
             <a:r>
@@ -9041,7 +9273,7 @@
           <a:bodyPr wrap="square" lIns="0" tIns="0" rIns="0" bIns="0" rtlCol="0" anchor="ctr"/>
           <a:lstStyle/>
           <a:p>
-            <a:pPr algn="ctr" indent="0" marL="0">
+            <a:pPr marL="0" indent="0" algn="ctr">
               <a:buNone/>
             </a:pPr>
             <a:r>
@@ -9085,17 +9317,24 @@
             <a:prstDash val="solid"/>
           </a:ln>
         </p:spPr>
+        <p:txBody>
+          <a:bodyPr/>
+          <a:lstStyle/>
+          <a:p>
+            <a:endParaRPr lang="en-DE"/>
+          </a:p>
+        </p:txBody>
       </p:sp>
       <p:pic>
         <p:nvPicPr>
-          <p:cNvPr id="16" name="Image 3" descr="preencoded.png">    </p:cNvPr>
+          <p:cNvPr id="16" name="Image 3" descr="preencoded.png"/>
           <p:cNvPicPr>
             <a:picLocks noChangeAspect="1"/>
           </p:cNvPicPr>
           <p:nvPr/>
         </p:nvPicPr>
         <p:blipFill>
-          <a:blip r:embed="rId4"/>
+          <a:blip r:embed="rId6"/>
           <a:stretch>
             <a:fillRect/>
           </a:stretch>
@@ -9131,7 +9370,7 @@
           <a:bodyPr wrap="square" lIns="0" tIns="0" rIns="0" bIns="0" rtlCol="0" anchor="ctr"/>
           <a:lstStyle/>
           <a:p>
-            <a:pPr algn="ctr" indent="0" marL="0">
+            <a:pPr marL="0" indent="0" algn="ctr">
               <a:buNone/>
             </a:pPr>
             <a:r>
@@ -9170,7 +9409,7 @@
           <a:bodyPr wrap="square" lIns="0" tIns="0" rIns="0" bIns="0" rtlCol="0" anchor="ctr"/>
           <a:lstStyle/>
           <a:p>
-            <a:pPr algn="ctr" indent="0" marL="0">
+            <a:pPr marL="0" indent="0" algn="ctr">
               <a:buNone/>
             </a:pPr>
             <a:r>
@@ -9214,17 +9453,24 @@
             <a:prstDash val="solid"/>
           </a:ln>
         </p:spPr>
+        <p:txBody>
+          <a:bodyPr/>
+          <a:lstStyle/>
+          <a:p>
+            <a:endParaRPr lang="en-DE"/>
+          </a:p>
+        </p:txBody>
       </p:sp>
       <p:pic>
         <p:nvPicPr>
-          <p:cNvPr id="20" name="Image 4" descr="preencoded.png">    </p:cNvPr>
+          <p:cNvPr id="20" name="Image 4" descr="preencoded.png"/>
           <p:cNvPicPr>
             <a:picLocks noChangeAspect="1"/>
           </p:cNvPicPr>
           <p:nvPr/>
         </p:nvPicPr>
         <p:blipFill>
-          <a:blip r:embed="rId5"/>
+          <a:blip r:embed="rId7"/>
           <a:stretch>
             <a:fillRect/>
           </a:stretch>
@@ -9260,7 +9506,7 @@
           <a:bodyPr wrap="square" lIns="0" tIns="0" rIns="0" bIns="0" rtlCol="0" anchor="ctr"/>
           <a:lstStyle/>
           <a:p>
-            <a:pPr algn="ctr" indent="0" marL="0">
+            <a:pPr marL="0" indent="0" algn="ctr">
               <a:buNone/>
             </a:pPr>
             <a:r>
@@ -9299,7 +9545,7 @@
           <a:bodyPr wrap="square" lIns="0" tIns="0" rIns="0" bIns="0" rtlCol="0" anchor="ctr"/>
           <a:lstStyle/>
           <a:p>
-            <a:pPr algn="ctr" indent="0" marL="0">
+            <a:pPr marL="0" indent="0" algn="ctr">
               <a:buNone/>
             </a:pPr>
             <a:r>
@@ -9343,6 +9589,13 @@
             <a:prstDash val="solid"/>
           </a:ln>
         </p:spPr>
+        <p:txBody>
+          <a:bodyPr/>
+          <a:lstStyle/>
+          <a:p>
+            <a:endParaRPr lang="en-DE"/>
+          </a:p>
+        </p:txBody>
       </p:sp>
       <p:sp>
         <p:nvSpPr>
@@ -9365,7 +9618,7 @@
           <a:bodyPr wrap="square" lIns="0" tIns="0" rIns="0" bIns="0" rtlCol="0" anchor="ctr"/>
           <a:lstStyle/>
           <a:p>
-            <a:pPr algn="ctr" indent="0" marL="0">
+            <a:pPr marL="0" indent="0" algn="ctr">
               <a:buNone/>
             </a:pPr>
             <a:r>
@@ -9404,7 +9657,7 @@
           <a:bodyPr wrap="square" lIns="0" tIns="0" rIns="0" bIns="0" rtlCol="0" anchor="ctr"/>
           <a:lstStyle/>
           <a:p>
-            <a:pPr algn="l" indent="0" marL="0">
+            <a:pPr marL="0" indent="0" algn="l">
               <a:buNone/>
             </a:pPr>
             <a:r>
@@ -9421,13 +9674,13 @@
             <a:endParaRPr lang="en-US" sz="1150" dirty="0"/>
           </a:p>
           <a:p>
-            <a:pPr algn="l" indent="0" marL="0">
+            <a:pPr marL="0" indent="0" algn="l">
               <a:buNone/>
             </a:pPr>
             <a:endParaRPr lang="en-US" sz="1150" dirty="0"/>
           </a:p>
           <a:p>
-            <a:pPr algn="l" indent="0" marL="0">
+            <a:pPr marL="0" indent="0" algn="l">
               <a:buNone/>
             </a:pPr>
             <a:r>
@@ -9461,6 +9714,7 @@
         <a:solidFill>
           <a:srgbClr val="F0F7FC"/>
         </a:solidFill>
+        <a:effectLst/>
       </p:bgPr>
     </p:bg>
     <p:spTree>
@@ -9498,7 +9752,7 @@
           <a:bodyPr wrap="square" lIns="0" tIns="0" rIns="0" bIns="0" rtlCol="0" anchor="ctr"/>
           <a:lstStyle/>
           <a:p>
-            <a:pPr indent="0" marL="0">
+            <a:pPr marL="0" indent="0">
               <a:buNone/>
             </a:pPr>
             <a:r>
@@ -9537,7 +9791,7 @@
           <a:bodyPr wrap="square" lIns="0" tIns="0" rIns="0" bIns="0" rtlCol="0" anchor="ctr"/>
           <a:lstStyle/>
           <a:p>
-            <a:pPr indent="0" marL="0">
+            <a:pPr marL="0" indent="0">
               <a:buNone/>
             </a:pPr>
             <a:r>
@@ -9576,13 +9830,20 @@
           </a:solidFill>
           <a:ln/>
           <a:effectLst>
-            <a:outerShdw sx="100000" sy="100000" kx="0" ky="0" algn="bl" rotWithShape="0" blurRad="101600" dist="25400" dir="2700000">
+            <a:outerShdw blurRad="101600" dist="25400" dir="2700000" algn="bl" rotWithShape="0">
               <a:srgbClr val="000000">
                 <a:alpha val="8000"/>
               </a:srgbClr>
             </a:outerShdw>
           </a:effectLst>
         </p:spPr>
+        <p:txBody>
+          <a:bodyPr/>
+          <a:lstStyle/>
+          <a:p>
+            <a:endParaRPr lang="en-DE"/>
+          </a:p>
+        </p:txBody>
       </p:sp>
       <p:sp>
         <p:nvSpPr>
@@ -9610,6 +9871,13 @@
             <a:prstDash val="solid"/>
           </a:ln>
         </p:spPr>
+        <p:txBody>
+          <a:bodyPr/>
+          <a:lstStyle/>
+          <a:p>
+            <a:endParaRPr lang="en-DE"/>
+          </a:p>
+        </p:txBody>
       </p:sp>
       <p:sp>
         <p:nvSpPr>
@@ -9632,7 +9900,7 @@
           <a:bodyPr wrap="square" lIns="0" tIns="0" rIns="0" bIns="0" rtlCol="0" anchor="ctr"/>
           <a:lstStyle/>
           <a:p>
-            <a:pPr indent="0" marL="0">
+            <a:pPr marL="0" indent="0">
               <a:buNone/>
             </a:pPr>
             <a:r>
@@ -9671,7 +9939,7 @@
           <a:bodyPr wrap="square" lIns="0" tIns="0" rIns="0" bIns="0" rtlCol="0" anchor="ctr"/>
           <a:lstStyle/>
           <a:p>
-            <a:pPr algn="ctr" indent="0" marL="0">
+            <a:pPr marL="0" indent="0" algn="ctr">
               <a:buNone/>
             </a:pPr>
             <a:r>
@@ -9710,7 +9978,7 @@
           <a:bodyPr wrap="square" lIns="0" tIns="0" rIns="0" bIns="0" rtlCol="0" anchor="ctr"/>
           <a:lstStyle/>
           <a:p>
-            <a:pPr indent="0" marL="0">
+            <a:pPr marL="0" indent="0">
               <a:buNone/>
             </a:pPr>
             <a:r>
@@ -9727,7 +9995,7 @@
             <a:endParaRPr lang="en-US" sz="1000" dirty="0"/>
           </a:p>
           <a:p>
-            <a:pPr indent="0" marL="0">
+            <a:pPr marL="0" indent="0">
               <a:buNone/>
             </a:pPr>
             <a:r>
@@ -9766,13 +10034,20 @@
           </a:solidFill>
           <a:ln/>
           <a:effectLst>
-            <a:outerShdw sx="100000" sy="100000" kx="0" ky="0" algn="bl" rotWithShape="0" blurRad="101600" dist="25400" dir="2700000">
+            <a:outerShdw blurRad="101600" dist="25400" dir="2700000" algn="bl" rotWithShape="0">
               <a:srgbClr val="000000">
                 <a:alpha val="8000"/>
               </a:srgbClr>
             </a:outerShdw>
           </a:effectLst>
         </p:spPr>
+        <p:txBody>
+          <a:bodyPr/>
+          <a:lstStyle/>
+          <a:p>
+            <a:endParaRPr lang="en-DE"/>
+          </a:p>
+        </p:txBody>
       </p:sp>
       <p:sp>
         <p:nvSpPr>
@@ -9800,6 +10075,13 @@
             <a:prstDash val="solid"/>
           </a:ln>
         </p:spPr>
+        <p:txBody>
+          <a:bodyPr/>
+          <a:lstStyle/>
+          <a:p>
+            <a:endParaRPr lang="en-DE"/>
+          </a:p>
+        </p:txBody>
       </p:sp>
       <p:sp>
         <p:nvSpPr>
@@ -9822,7 +10104,7 @@
           <a:bodyPr wrap="square" lIns="0" tIns="0" rIns="0" bIns="0" rtlCol="0" anchor="ctr"/>
           <a:lstStyle/>
           <a:p>
-            <a:pPr indent="0" marL="0">
+            <a:pPr marL="0" indent="0">
               <a:buNone/>
             </a:pPr>
             <a:r>
@@ -9861,7 +10143,7 @@
           <a:bodyPr wrap="square" lIns="0" tIns="0" rIns="0" bIns="0" rtlCol="0" anchor="ctr"/>
           <a:lstStyle/>
           <a:p>
-            <a:pPr algn="ctr" indent="0" marL="0">
+            <a:pPr marL="0" indent="0" algn="ctr">
               <a:buNone/>
             </a:pPr>
             <a:r>
@@ -9900,7 +10182,7 @@
           <a:bodyPr wrap="square" lIns="0" tIns="0" rIns="0" bIns="0" rtlCol="0" anchor="ctr"/>
           <a:lstStyle/>
           <a:p>
-            <a:pPr indent="0" marL="0">
+            <a:pPr marL="0" indent="0">
               <a:buNone/>
             </a:pPr>
             <a:r>
@@ -9917,7 +10199,7 @@
             <a:endParaRPr lang="en-US" sz="1000" dirty="0"/>
           </a:p>
           <a:p>
-            <a:pPr indent="0" marL="0">
+            <a:pPr marL="0" indent="0">
               <a:buNone/>
             </a:pPr>
             <a:r>
@@ -9961,6 +10243,13 @@
             <a:prstDash val="solid"/>
           </a:ln>
         </p:spPr>
+        <p:txBody>
+          <a:bodyPr/>
+          <a:lstStyle/>
+          <a:p>
+            <a:endParaRPr lang="en-DE"/>
+          </a:p>
+        </p:txBody>
       </p:sp>
       <p:sp>
         <p:nvSpPr>
@@ -9983,7 +10272,7 @@
           <a:bodyPr wrap="square" lIns="0" tIns="0" rIns="0" bIns="0" rtlCol="0" anchor="ctr"/>
           <a:lstStyle/>
           <a:p>
-            <a:pPr indent="0" marL="0">
+            <a:pPr marL="0" indent="0">
               <a:buNone/>
             </a:pPr>
             <a:r>
@@ -10022,7 +10311,7 @@
           <a:bodyPr wrap="square" lIns="0" tIns="0" rIns="0" bIns="0" rtlCol="0" anchor="ctr"/>
           <a:lstStyle/>
           <a:p>
-            <a:pPr indent="0" marL="0">
+            <a:pPr marL="0" indent="0">
               <a:buNone/>
             </a:pPr>
             <a:r>
@@ -10061,7 +10350,7 @@
           <a:bodyPr wrap="square" lIns="0" tIns="0" rIns="0" bIns="0" rtlCol="0" anchor="ctr"/>
           <a:lstStyle/>
           <a:p>
-            <a:pPr indent="0" marL="0">
+            <a:pPr marL="0" indent="0">
               <a:buNone/>
             </a:pPr>
             <a:r>
@@ -10100,7 +10389,7 @@
           <a:bodyPr wrap="square" lIns="0" tIns="0" rIns="0" bIns="0" rtlCol="0" anchor="ctr"/>
           <a:lstStyle/>
           <a:p>
-            <a:pPr indent="0" marL="0">
+            <a:pPr marL="0" indent="0">
               <a:buNone/>
             </a:pPr>
             <a:r>
@@ -10139,7 +10428,7 @@
           <a:bodyPr wrap="square" lIns="0" tIns="0" rIns="0" bIns="0" rtlCol="0" anchor="ctr"/>
           <a:lstStyle/>
           <a:p>
-            <a:pPr indent="0" marL="0">
+            <a:pPr marL="0" indent="0">
               <a:buNone/>
             </a:pPr>
             <a:r>
@@ -10173,6 +10462,7 @@
         <a:solidFill>
           <a:srgbClr val="FFFFFF"/>
         </a:solidFill>
+        <a:effectLst/>
       </p:bgPr>
     </p:bg>
     <p:spTree>
@@ -10210,7 +10500,7 @@
           <a:bodyPr wrap="square" lIns="0" tIns="0" rIns="0" bIns="0" rtlCol="0" anchor="ctr"/>
           <a:lstStyle/>
           <a:p>
-            <a:pPr indent="0" marL="0">
+            <a:pPr marL="0" indent="0">
               <a:buNone/>
             </a:pPr>
             <a:r>
@@ -10230,7 +10520,7 @@
       </p:sp>
       <p:graphicFrame>
         <p:nvGraphicFramePr>
-          <p:cNvPr id="3" name="Chart 0" descr=""/>
+          <p:cNvPr id="3" name="Chart 0"/>
           <p:cNvGraphicFramePr/>
           <p:nvPr/>
         </p:nvGraphicFramePr>
@@ -10238,9 +10528,9 @@
           <a:off x="365760" y="868680"/>
           <a:ext cx="5303520" cy="3931920"/>
         </p:xfrm>
-        <a:graphic xmlns:a="http://schemas.openxmlformats.org/drawingml/2006/main">
+        <a:graphic>
           <a:graphicData uri="http://schemas.openxmlformats.org/drawingml/2006/chart">
-            <c:chart xmlns:c="http://schemas.openxmlformats.org/drawingml/2006/chart" r:id="rId1"/>
+            <c:chart xmlns:c="http://schemas.openxmlformats.org/drawingml/2006/chart" xmlns:r="http://schemas.openxmlformats.org/officeDocument/2006/relationships" r:id="rId3"/>
           </a:graphicData>
         </a:graphic>
       </p:graphicFrame>
@@ -10270,6 +10560,13 @@
             <a:prstDash val="solid"/>
           </a:ln>
         </p:spPr>
+        <p:txBody>
+          <a:bodyPr/>
+          <a:lstStyle/>
+          <a:p>
+            <a:endParaRPr lang="en-DE"/>
+          </a:p>
+        </p:txBody>
       </p:sp>
       <p:sp>
         <p:nvSpPr>
@@ -10292,7 +10589,7 @@
           <a:bodyPr wrap="square" lIns="0" tIns="0" rIns="0" bIns="0" rtlCol="0" anchor="ctr"/>
           <a:lstStyle/>
           <a:p>
-            <a:pPr algn="ctr" indent="0" marL="0">
+            <a:pPr marL="0" indent="0" algn="ctr">
               <a:buNone/>
             </a:pPr>
             <a:r>
@@ -10331,7 +10628,7 @@
           <a:bodyPr wrap="square" lIns="0" tIns="0" rIns="0" bIns="0" rtlCol="0" anchor="ctr"/>
           <a:lstStyle/>
           <a:p>
-            <a:pPr algn="ctr" indent="0" marL="0">
+            <a:pPr marL="0" indent="0" algn="ctr">
               <a:buNone/>
             </a:pPr>
             <a:r>
@@ -10370,7 +10667,7 @@
           <a:bodyPr wrap="square" lIns="0" tIns="0" rIns="0" bIns="0" rtlCol="0" anchor="ctr"/>
           <a:lstStyle/>
           <a:p>
-            <a:pPr algn="ctr" indent="0" marL="0">
+            <a:pPr marL="0" indent="0" algn="ctr">
               <a:buNone/>
             </a:pPr>
             <a:r>
@@ -10414,6 +10711,13 @@
             <a:prstDash val="solid"/>
           </a:ln>
         </p:spPr>
+        <p:txBody>
+          <a:bodyPr/>
+          <a:lstStyle/>
+          <a:p>
+            <a:endParaRPr lang="en-DE"/>
+          </a:p>
+        </p:txBody>
       </p:sp>
       <p:sp>
         <p:nvSpPr>
@@ -10436,7 +10740,7 @@
           <a:bodyPr wrap="square" lIns="0" tIns="0" rIns="0" bIns="0" rtlCol="0" anchor="ctr"/>
           <a:lstStyle/>
           <a:p>
-            <a:pPr algn="ctr" indent="0" marL="0">
+            <a:pPr marL="0" indent="0" algn="ctr">
               <a:buNone/>
             </a:pPr>
             <a:r>
@@ -10475,7 +10779,7 @@
           <a:bodyPr wrap="square" lIns="0" tIns="0" rIns="0" bIns="0" rtlCol="0" anchor="ctr"/>
           <a:lstStyle/>
           <a:p>
-            <a:pPr algn="ctr" indent="0" marL="0">
+            <a:pPr marL="0" indent="0" algn="ctr">
               <a:buNone/>
             </a:pPr>
             <a:r>
@@ -10514,7 +10818,7 @@
           <a:bodyPr wrap="square" lIns="0" tIns="0" rIns="0" bIns="0" rtlCol="0" anchor="ctr"/>
           <a:lstStyle/>
           <a:p>
-            <a:pPr algn="ctr" indent="0" marL="0">
+            <a:pPr marL="0" indent="0" algn="ctr">
               <a:buNone/>
             </a:pPr>
             <a:r>
@@ -10558,6 +10862,13 @@
             <a:prstDash val="solid"/>
           </a:ln>
         </p:spPr>
+        <p:txBody>
+          <a:bodyPr/>
+          <a:lstStyle/>
+          <a:p>
+            <a:endParaRPr lang="en-DE"/>
+          </a:p>
+        </p:txBody>
       </p:sp>
       <p:sp>
         <p:nvSpPr>
@@ -10580,7 +10891,7 @@
           <a:bodyPr wrap="square" lIns="0" tIns="0" rIns="0" bIns="0" rtlCol="0" anchor="ctr"/>
           <a:lstStyle/>
           <a:p>
-            <a:pPr indent="0" marL="0">
+            <a:pPr marL="0" indent="0">
               <a:buNone/>
             </a:pPr>
             <a:r>
@@ -10619,7 +10930,7 @@
           <a:bodyPr wrap="square" lIns="0" tIns="0" rIns="0" bIns="0" rtlCol="0" anchor="ctr"/>
           <a:lstStyle/>
           <a:p>
-            <a:pPr indent="0" marL="0">
+            <a:pPr marL="0" indent="0">
               <a:buNone/>
             </a:pPr>
             <a:r>
@@ -10938,4 +11249,319 @@
     </a:ext>
   </a:extLst>
 </a:theme>
+</file>
+
+<file path=ppt/theme/theme2.xml><?xml version="1.0" encoding="utf-8"?>
+<a:theme xmlns:a="http://schemas.openxmlformats.org/drawingml/2006/main" name="Office Theme">
+  <a:themeElements>
+    <a:clrScheme name="Office">
+      <a:dk1>
+        <a:sysClr val="windowText" lastClr="000000"/>
+      </a:dk1>
+      <a:lt1>
+        <a:sysClr val="window" lastClr="FFFFFF"/>
+      </a:lt1>
+      <a:dk2>
+        <a:srgbClr val="0E2841"/>
+      </a:dk2>
+      <a:lt2>
+        <a:srgbClr val="E8E8E8"/>
+      </a:lt2>
+      <a:accent1>
+        <a:srgbClr val="156082"/>
+      </a:accent1>
+      <a:accent2>
+        <a:srgbClr val="E97132"/>
+      </a:accent2>
+      <a:accent3>
+        <a:srgbClr val="196B24"/>
+      </a:accent3>
+      <a:accent4>
+        <a:srgbClr val="0F9ED5"/>
+      </a:accent4>
+      <a:accent5>
+        <a:srgbClr val="A02B93"/>
+      </a:accent5>
+      <a:accent6>
+        <a:srgbClr val="4EA72E"/>
+      </a:accent6>
+      <a:hlink>
+        <a:srgbClr val="467886"/>
+      </a:hlink>
+      <a:folHlink>
+        <a:srgbClr val="96607D"/>
+      </a:folHlink>
+    </a:clrScheme>
+    <a:fontScheme name="Office">
+      <a:majorFont>
+        <a:latin typeface="Aptos Display" panose="02110004020202020204"/>
+        <a:ea typeface=""/>
+        <a:cs typeface=""/>
+        <a:font script="Jpan" typeface="游ゴシック Light"/>
+        <a:font script="Hang" typeface="맑은 고딕"/>
+        <a:font script="Hans" typeface="等线 Light"/>
+        <a:font script="Hant" typeface="新細明體"/>
+        <a:font script="Arab" typeface="Times New Roman"/>
+        <a:font script="Hebr" typeface="Times New Roman"/>
+        <a:font script="Thai" typeface="Angsana New"/>
+        <a:font script="Ethi" typeface="Nyala"/>
+        <a:font script="Beng" typeface="Vrinda"/>
+        <a:font script="Gujr" typeface="Shruti"/>
+        <a:font script="Khmr" typeface="MoolBoran"/>
+        <a:font script="Knda" typeface="Tunga"/>
+        <a:font script="Guru" typeface="Raavi"/>
+        <a:font script="Cans" typeface="Euphemia"/>
+        <a:font script="Cher" typeface="Plantagenet Cherokee"/>
+        <a:font script="Yiii" typeface="Microsoft Yi Baiti"/>
+        <a:font script="Tibt" typeface="Microsoft Himalaya"/>
+        <a:font script="Thaa" typeface="MV Boli"/>
+        <a:font script="Deva" typeface="Mangal"/>
+        <a:font script="Telu" typeface="Gautami"/>
+        <a:font script="Taml" typeface="Latha"/>
+        <a:font script="Syrc" typeface="Estrangelo Edessa"/>
+        <a:font script="Orya" typeface="Kalinga"/>
+        <a:font script="Mlym" typeface="Kartika"/>
+        <a:font script="Laoo" typeface="DokChampa"/>
+        <a:font script="Sinh" typeface="Iskoola Pota"/>
+        <a:font script="Mong" typeface="Mongolian Baiti"/>
+        <a:font script="Viet" typeface="Times New Roman"/>
+        <a:font script="Uigh" typeface="Microsoft Uighur"/>
+        <a:font script="Geor" typeface="Sylfaen"/>
+        <a:font script="Armn" typeface="Arial"/>
+        <a:font script="Bugi" typeface="Leelawadee UI"/>
+        <a:font script="Bopo" typeface="Microsoft JhengHei"/>
+        <a:font script="Java" typeface="Javanese Text"/>
+        <a:font script="Lisu" typeface="Segoe UI"/>
+        <a:font script="Mymr" typeface="Myanmar Text"/>
+        <a:font script="Nkoo" typeface="Ebrima"/>
+        <a:font script="Olck" typeface="Nirmala UI"/>
+        <a:font script="Osma" typeface="Ebrima"/>
+        <a:font script="Phag" typeface="Phagspa"/>
+        <a:font script="Syrn" typeface="Estrangelo Edessa"/>
+        <a:font script="Syrj" typeface="Estrangelo Edessa"/>
+        <a:font script="Syre" typeface="Estrangelo Edessa"/>
+        <a:font script="Sora" typeface="Nirmala UI"/>
+        <a:font script="Tale" typeface="Microsoft Tai Le"/>
+        <a:font script="Talu" typeface="Microsoft New Tai Lue"/>
+        <a:font script="Tfng" typeface="Ebrima"/>
+      </a:majorFont>
+      <a:minorFont>
+        <a:latin typeface="Aptos" panose="02110004020202020204"/>
+        <a:ea typeface=""/>
+        <a:cs typeface=""/>
+        <a:font script="Jpan" typeface="游ゴシック"/>
+        <a:font script="Hang" typeface="맑은 고딕"/>
+        <a:font script="Hans" typeface="等线"/>
+        <a:font script="Hant" typeface="新細明體"/>
+        <a:font script="Arab" typeface="Arial"/>
+        <a:font script="Hebr" typeface="Arial"/>
+        <a:font script="Thai" typeface="Cordia New"/>
+        <a:font script="Ethi" typeface="Nyala"/>
+        <a:font script="Beng" typeface="Vrinda"/>
+        <a:font script="Gujr" typeface="Shruti"/>
+        <a:font script="Khmr" typeface="DaunPenh"/>
+        <a:font script="Knda" typeface="Tunga"/>
+        <a:font script="Guru" typeface="Raavi"/>
+        <a:font script="Cans" typeface="Euphemia"/>
+        <a:font script="Cher" typeface="Plantagenet Cherokee"/>
+        <a:font script="Yiii" typeface="Microsoft Yi Baiti"/>
+        <a:font script="Tibt" typeface="Microsoft Himalaya"/>
+        <a:font script="Thaa" typeface="MV Boli"/>
+        <a:font script="Deva" typeface="Mangal"/>
+        <a:font script="Telu" typeface="Gautami"/>
+        <a:font script="Taml" typeface="Latha"/>
+        <a:font script="Syrc" typeface="Estrangelo Edessa"/>
+        <a:font script="Orya" typeface="Kalinga"/>
+        <a:font script="Mlym" typeface="Kartika"/>
+        <a:font script="Laoo" typeface="DokChampa"/>
+        <a:font script="Sinh" typeface="Iskoola Pota"/>
+        <a:font script="Mong" typeface="Mongolian Baiti"/>
+        <a:font script="Viet" typeface="Arial"/>
+        <a:font script="Uigh" typeface="Microsoft Uighur"/>
+        <a:font script="Geor" typeface="Sylfaen"/>
+        <a:font script="Armn" typeface="Arial"/>
+        <a:font script="Bugi" typeface="Leelawadee UI"/>
+        <a:font script="Bopo" typeface="Microsoft JhengHei"/>
+        <a:font script="Java" typeface="Javanese Text"/>
+        <a:font script="Lisu" typeface="Segoe UI"/>
+        <a:font script="Mymr" typeface="Myanmar Text"/>
+        <a:font script="Nkoo" typeface="Ebrima"/>
+        <a:font script="Olck" typeface="Nirmala UI"/>
+        <a:font script="Osma" typeface="Ebrima"/>
+        <a:font script="Phag" typeface="Phagspa"/>
+        <a:font script="Syrn" typeface="Estrangelo Edessa"/>
+        <a:font script="Syrj" typeface="Estrangelo Edessa"/>
+        <a:font script="Syre" typeface="Estrangelo Edessa"/>
+        <a:font script="Sora" typeface="Nirmala UI"/>
+        <a:font script="Tale" typeface="Microsoft Tai Le"/>
+        <a:font script="Talu" typeface="Microsoft New Tai Lue"/>
+        <a:font script="Tfng" typeface="Ebrima"/>
+      </a:minorFont>
+    </a:fontScheme>
+    <a:fmtScheme name="Office">
+      <a:fillStyleLst>
+        <a:solidFill>
+          <a:schemeClr val="phClr"/>
+        </a:solidFill>
+        <a:gradFill rotWithShape="1">
+          <a:gsLst>
+            <a:gs pos="0">
+              <a:schemeClr val="phClr">
+                <a:lumMod val="110000"/>
+                <a:satMod val="105000"/>
+                <a:tint val="67000"/>
+              </a:schemeClr>
+            </a:gs>
+            <a:gs pos="50000">
+              <a:schemeClr val="phClr">
+                <a:lumMod val="105000"/>
+                <a:satMod val="103000"/>
+                <a:tint val="73000"/>
+              </a:schemeClr>
+            </a:gs>
+            <a:gs pos="100000">
+              <a:schemeClr val="phClr">
+                <a:lumMod val="105000"/>
+                <a:satMod val="109000"/>
+                <a:tint val="81000"/>
+              </a:schemeClr>
+            </a:gs>
+          </a:gsLst>
+          <a:lin ang="5400000" scaled="0"/>
+        </a:gradFill>
+        <a:gradFill rotWithShape="1">
+          <a:gsLst>
+            <a:gs pos="0">
+              <a:schemeClr val="phClr">
+                <a:satMod val="103000"/>
+                <a:lumMod val="102000"/>
+                <a:tint val="94000"/>
+              </a:schemeClr>
+            </a:gs>
+            <a:gs pos="50000">
+              <a:schemeClr val="phClr">
+                <a:satMod val="110000"/>
+                <a:lumMod val="100000"/>
+                <a:shade val="100000"/>
+              </a:schemeClr>
+            </a:gs>
+            <a:gs pos="100000">
+              <a:schemeClr val="phClr">
+                <a:lumMod val="99000"/>
+                <a:satMod val="120000"/>
+                <a:shade val="78000"/>
+              </a:schemeClr>
+            </a:gs>
+          </a:gsLst>
+          <a:lin ang="5400000" scaled="0"/>
+        </a:gradFill>
+      </a:fillStyleLst>
+      <a:lnStyleLst>
+        <a:ln w="12700" cap="flat" cmpd="sng" algn="ctr">
+          <a:solidFill>
+            <a:schemeClr val="phClr"/>
+          </a:solidFill>
+          <a:prstDash val="solid"/>
+          <a:miter lim="800000"/>
+        </a:ln>
+        <a:ln w="19050" cap="flat" cmpd="sng" algn="ctr">
+          <a:solidFill>
+            <a:schemeClr val="phClr"/>
+          </a:solidFill>
+          <a:prstDash val="solid"/>
+          <a:miter lim="800000"/>
+        </a:ln>
+        <a:ln w="25400" cap="flat" cmpd="sng" algn="ctr">
+          <a:solidFill>
+            <a:schemeClr val="phClr"/>
+          </a:solidFill>
+          <a:prstDash val="solid"/>
+          <a:miter lim="800000"/>
+        </a:ln>
+      </a:lnStyleLst>
+      <a:effectStyleLst>
+        <a:effectStyle>
+          <a:effectLst/>
+        </a:effectStyle>
+        <a:effectStyle>
+          <a:effectLst/>
+        </a:effectStyle>
+        <a:effectStyle>
+          <a:effectLst>
+            <a:outerShdw blurRad="57150" dist="19050" dir="5400000" algn="ctr" rotWithShape="0">
+              <a:srgbClr val="000000">
+                <a:alpha val="63000"/>
+              </a:srgbClr>
+            </a:outerShdw>
+          </a:effectLst>
+        </a:effectStyle>
+      </a:effectStyleLst>
+      <a:bgFillStyleLst>
+        <a:solidFill>
+          <a:schemeClr val="phClr"/>
+        </a:solidFill>
+        <a:solidFill>
+          <a:schemeClr val="phClr">
+            <a:tint val="95000"/>
+            <a:satMod val="170000"/>
+          </a:schemeClr>
+        </a:solidFill>
+        <a:gradFill rotWithShape="1">
+          <a:gsLst>
+            <a:gs pos="0">
+              <a:schemeClr val="phClr">
+                <a:tint val="93000"/>
+                <a:satMod val="150000"/>
+                <a:shade val="98000"/>
+                <a:lumMod val="102000"/>
+              </a:schemeClr>
+            </a:gs>
+            <a:gs pos="50000">
+              <a:schemeClr val="phClr">
+                <a:tint val="98000"/>
+                <a:satMod val="130000"/>
+                <a:shade val="90000"/>
+                <a:lumMod val="103000"/>
+              </a:schemeClr>
+            </a:gs>
+            <a:gs pos="100000">
+              <a:schemeClr val="phClr">
+                <a:shade val="63000"/>
+                <a:satMod val="120000"/>
+              </a:schemeClr>
+            </a:gs>
+          </a:gsLst>
+          <a:lin ang="5400000" scaled="0"/>
+        </a:gradFill>
+      </a:bgFillStyleLst>
+    </a:fmtScheme>
+  </a:themeElements>
+  <a:objectDefaults>
+    <a:lnDef>
+      <a:spPr/>
+      <a:bodyPr/>
+      <a:lstStyle/>
+      <a:style>
+        <a:lnRef idx="2">
+          <a:schemeClr val="accent1"/>
+        </a:lnRef>
+        <a:fillRef idx="0">
+          <a:schemeClr val="accent1"/>
+        </a:fillRef>
+        <a:effectRef idx="1">
+          <a:schemeClr val="accent1"/>
+        </a:effectRef>
+        <a:fontRef idx="minor">
+          <a:schemeClr val="tx1"/>
+        </a:fontRef>
+      </a:style>
+    </a:lnDef>
+  </a:objectDefaults>
+  <a:extraClrSchemeLst/>
+  <a:extLst>
+    <a:ext uri="{05A4C25C-085E-4340-85A3-A5531E510DB2}">
+      <thm15:themeFamily xmlns:thm15="http://schemas.microsoft.com/office/thememl/2012/main" name="Office Theme" id="{2E142A2C-CD16-42D6-873A-C26D2A0506FA}" vid="{1BDDFF52-6CD6-40A5-AB3C-68EB2F1E4D0A}"/>
+    </a:ext>
+  </a:extLst>
+</a:theme>
 </file>